--- a/public/videos/repositories/retro-new-games-app/retro-new-games-app-tech-preview.pptx
+++ b/public/videos/repositories/retro-new-games-app/retro-new-games-app-tech-preview.pptx
@@ -134,7 +134,7 @@
           <p:cNvPr id="2" name="タイトル 1">
             <a:extLst>
               <a:ext uri="{FF2B5EF4-FFF2-40B4-BE49-F238E27FC236}">
-                <a16:creationId xmlns:a16="http://schemas.microsoft.com/office/drawing/2014/main" id="{D62D90C6-5E7B-46C1-4F84-ED6F20AF045B}"/>
+                <a16:creationId xmlns:a16="http://schemas.microsoft.com/office/drawing/2014/main" id="{D44479E5-3A41-2885-067A-5F34C3D40E05}"/>
               </a:ext>
             </a:extLst>
           </p:cNvPr>
@@ -171,7 +171,7 @@
           <p:cNvPr id="3" name="字幕 2">
             <a:extLst>
               <a:ext uri="{FF2B5EF4-FFF2-40B4-BE49-F238E27FC236}">
-                <a16:creationId xmlns:a16="http://schemas.microsoft.com/office/drawing/2014/main" id="{DF36232D-9266-9977-311B-8218BD13DFBC}"/>
+                <a16:creationId xmlns:a16="http://schemas.microsoft.com/office/drawing/2014/main" id="{1D132459-8B8F-90AB-0691-A6F47452B07B}"/>
               </a:ext>
             </a:extLst>
           </p:cNvPr>
@@ -241,7 +241,7 @@
           <p:cNvPr id="4" name="日付プレースホルダー 3">
             <a:extLst>
               <a:ext uri="{FF2B5EF4-FFF2-40B4-BE49-F238E27FC236}">
-                <a16:creationId xmlns:a16="http://schemas.microsoft.com/office/drawing/2014/main" id="{3852B0CF-484C-7F6F-A206-5124B2FAAFA1}"/>
+                <a16:creationId xmlns:a16="http://schemas.microsoft.com/office/drawing/2014/main" id="{7EC54298-BD58-AD79-A27D-7644B0573B23}"/>
               </a:ext>
             </a:extLst>
           </p:cNvPr>
@@ -257,7 +257,7 @@
           <a:bodyPr/>
           <a:lstStyle/>
           <a:p>
-            <a:fld id="{9686651F-D23F-440B-9D90-092396846997}" type="datetimeFigureOut">
+            <a:fld id="{0D330DDB-BE35-4E13-B23E-AA6D7DFAD045}" type="datetimeFigureOut">
               <a:rPr kumimoji="1" lang="ja-JP" altLang="en-US" smtClean="0"/>
               <a:t>2026/7/30</a:t>
             </a:fld>
@@ -270,7 +270,7 @@
           <p:cNvPr id="5" name="フッター プレースホルダー 4">
             <a:extLst>
               <a:ext uri="{FF2B5EF4-FFF2-40B4-BE49-F238E27FC236}">
-                <a16:creationId xmlns:a16="http://schemas.microsoft.com/office/drawing/2014/main" id="{C756FB0F-6A54-F8DF-C446-B0F78BF7FFD9}"/>
+                <a16:creationId xmlns:a16="http://schemas.microsoft.com/office/drawing/2014/main" id="{C249ACAF-BE36-9B6D-EAC8-88F7A4459304}"/>
               </a:ext>
             </a:extLst>
           </p:cNvPr>
@@ -295,7 +295,7 @@
           <p:cNvPr id="6" name="スライド番号プレースホルダー 5">
             <a:extLst>
               <a:ext uri="{FF2B5EF4-FFF2-40B4-BE49-F238E27FC236}">
-                <a16:creationId xmlns:a16="http://schemas.microsoft.com/office/drawing/2014/main" id="{749EA241-C506-657A-ABA7-6E2D987032E4}"/>
+                <a16:creationId xmlns:a16="http://schemas.microsoft.com/office/drawing/2014/main" id="{738A7945-0101-1757-2555-F6BD09AD006E}"/>
               </a:ext>
             </a:extLst>
           </p:cNvPr>
@@ -311,7 +311,7 @@
           <a:bodyPr/>
           <a:lstStyle/>
           <a:p>
-            <a:fld id="{8017B638-6AA4-4EC8-B58F-4F6FECBF4B10}" type="slidenum">
+            <a:fld id="{EA0B4B91-38E6-45A8-9CBA-F15391A01C9B}" type="slidenum">
               <a:rPr kumimoji="1" lang="ja-JP" altLang="en-US" smtClean="0"/>
               <a:t>‹#›</a:t>
             </a:fld>
@@ -322,7 +322,7 @@
     </p:spTree>
     <p:extLst>
       <p:ext uri="{BB962C8B-B14F-4D97-AF65-F5344CB8AC3E}">
-        <p14:creationId xmlns:p14="http://schemas.microsoft.com/office/powerpoint/2010/main" val="1493997467"/>
+        <p14:creationId xmlns:p14="http://schemas.microsoft.com/office/powerpoint/2010/main" val="549609915"/>
       </p:ext>
     </p:extLst>
   </p:cSld>
@@ -354,7 +354,7 @@
           <p:cNvPr id="2" name="タイトル 1">
             <a:extLst>
               <a:ext uri="{FF2B5EF4-FFF2-40B4-BE49-F238E27FC236}">
-                <a16:creationId xmlns:a16="http://schemas.microsoft.com/office/drawing/2014/main" id="{9441E8D1-D5C0-80F0-7E9D-3F08B2F679A4}"/>
+                <a16:creationId xmlns:a16="http://schemas.microsoft.com/office/drawing/2014/main" id="{CA7EE158-6299-83A3-3D5C-50A951985441}"/>
               </a:ext>
             </a:extLst>
           </p:cNvPr>
@@ -382,7 +382,7 @@
           <p:cNvPr id="3" name="縦書きテキスト プレースホルダー 2">
             <a:extLst>
               <a:ext uri="{FF2B5EF4-FFF2-40B4-BE49-F238E27FC236}">
-                <a16:creationId xmlns:a16="http://schemas.microsoft.com/office/drawing/2014/main" id="{2E7AAD4C-567E-5382-E510-D66BCB1C74E6}"/>
+                <a16:creationId xmlns:a16="http://schemas.microsoft.com/office/drawing/2014/main" id="{BFC0D6E8-6738-A715-2840-D2F3A7C41540}"/>
               </a:ext>
             </a:extLst>
           </p:cNvPr>
@@ -471,7 +471,7 @@
           <p:cNvPr id="4" name="日付プレースホルダー 3">
             <a:extLst>
               <a:ext uri="{FF2B5EF4-FFF2-40B4-BE49-F238E27FC236}">
-                <a16:creationId xmlns:a16="http://schemas.microsoft.com/office/drawing/2014/main" id="{ECE4DF49-697C-6B1D-CBCF-DE49AE5C4213}"/>
+                <a16:creationId xmlns:a16="http://schemas.microsoft.com/office/drawing/2014/main" id="{482D4216-6729-02F2-5375-A1216DA5890C}"/>
               </a:ext>
             </a:extLst>
           </p:cNvPr>
@@ -487,7 +487,7 @@
           <a:bodyPr/>
           <a:lstStyle/>
           <a:p>
-            <a:fld id="{9686651F-D23F-440B-9D90-092396846997}" type="datetimeFigureOut">
+            <a:fld id="{0D330DDB-BE35-4E13-B23E-AA6D7DFAD045}" type="datetimeFigureOut">
               <a:rPr kumimoji="1" lang="ja-JP" altLang="en-US" smtClean="0"/>
               <a:t>2026/7/30</a:t>
             </a:fld>
@@ -500,7 +500,7 @@
           <p:cNvPr id="5" name="フッター プレースホルダー 4">
             <a:extLst>
               <a:ext uri="{FF2B5EF4-FFF2-40B4-BE49-F238E27FC236}">
-                <a16:creationId xmlns:a16="http://schemas.microsoft.com/office/drawing/2014/main" id="{9B548E30-0B2E-80FA-013E-F0DBF34D608D}"/>
+                <a16:creationId xmlns:a16="http://schemas.microsoft.com/office/drawing/2014/main" id="{4650A47C-ABA0-0D43-5CDE-836F4010463A}"/>
               </a:ext>
             </a:extLst>
           </p:cNvPr>
@@ -525,7 +525,7 @@
           <p:cNvPr id="6" name="スライド番号プレースホルダー 5">
             <a:extLst>
               <a:ext uri="{FF2B5EF4-FFF2-40B4-BE49-F238E27FC236}">
-                <a16:creationId xmlns:a16="http://schemas.microsoft.com/office/drawing/2014/main" id="{AA6839C1-1DB9-6576-D092-03EE56533FC0}"/>
+                <a16:creationId xmlns:a16="http://schemas.microsoft.com/office/drawing/2014/main" id="{9D622D99-7C13-79AB-2859-93AE6624ED8C}"/>
               </a:ext>
             </a:extLst>
           </p:cNvPr>
@@ -541,7 +541,7 @@
           <a:bodyPr/>
           <a:lstStyle/>
           <a:p>
-            <a:fld id="{8017B638-6AA4-4EC8-B58F-4F6FECBF4B10}" type="slidenum">
+            <a:fld id="{EA0B4B91-38E6-45A8-9CBA-F15391A01C9B}" type="slidenum">
               <a:rPr kumimoji="1" lang="ja-JP" altLang="en-US" smtClean="0"/>
               <a:t>‹#›</a:t>
             </a:fld>
@@ -552,7 +552,7 @@
     </p:spTree>
     <p:extLst>
       <p:ext uri="{BB962C8B-B14F-4D97-AF65-F5344CB8AC3E}">
-        <p14:creationId xmlns:p14="http://schemas.microsoft.com/office/powerpoint/2010/main" val="900773779"/>
+        <p14:creationId xmlns:p14="http://schemas.microsoft.com/office/powerpoint/2010/main" val="1089707001"/>
       </p:ext>
     </p:extLst>
   </p:cSld>
@@ -584,7 +584,7 @@
           <p:cNvPr id="2" name="縦書きタイトル 1">
             <a:extLst>
               <a:ext uri="{FF2B5EF4-FFF2-40B4-BE49-F238E27FC236}">
-                <a16:creationId xmlns:a16="http://schemas.microsoft.com/office/drawing/2014/main" id="{721EB199-8223-C00A-1C26-185646F79F74}"/>
+                <a16:creationId xmlns:a16="http://schemas.microsoft.com/office/drawing/2014/main" id="{8C770804-D9C5-A367-0DFF-C6D899CC2335}"/>
               </a:ext>
             </a:extLst>
           </p:cNvPr>
@@ -617,7 +617,7 @@
           <p:cNvPr id="3" name="縦書きテキスト プレースホルダー 2">
             <a:extLst>
               <a:ext uri="{FF2B5EF4-FFF2-40B4-BE49-F238E27FC236}">
-                <a16:creationId xmlns:a16="http://schemas.microsoft.com/office/drawing/2014/main" id="{94242D14-54EA-4E98-CF04-0F1F71A3891E}"/>
+                <a16:creationId xmlns:a16="http://schemas.microsoft.com/office/drawing/2014/main" id="{BCC512B7-07DD-226D-4BE3-01D5ED69364D}"/>
               </a:ext>
             </a:extLst>
           </p:cNvPr>
@@ -711,7 +711,7 @@
           <p:cNvPr id="4" name="日付プレースホルダー 3">
             <a:extLst>
               <a:ext uri="{FF2B5EF4-FFF2-40B4-BE49-F238E27FC236}">
-                <a16:creationId xmlns:a16="http://schemas.microsoft.com/office/drawing/2014/main" id="{EB9C7E9A-D510-8321-5F43-DA17EE6A8FBF}"/>
+                <a16:creationId xmlns:a16="http://schemas.microsoft.com/office/drawing/2014/main" id="{E40A85D4-AF6B-8028-2978-60E3B77BC7C5}"/>
               </a:ext>
             </a:extLst>
           </p:cNvPr>
@@ -727,7 +727,7 @@
           <a:bodyPr/>
           <a:lstStyle/>
           <a:p>
-            <a:fld id="{9686651F-D23F-440B-9D90-092396846997}" type="datetimeFigureOut">
+            <a:fld id="{0D330DDB-BE35-4E13-B23E-AA6D7DFAD045}" type="datetimeFigureOut">
               <a:rPr kumimoji="1" lang="ja-JP" altLang="en-US" smtClean="0"/>
               <a:t>2026/7/30</a:t>
             </a:fld>
@@ -740,7 +740,7 @@
           <p:cNvPr id="5" name="フッター プレースホルダー 4">
             <a:extLst>
               <a:ext uri="{FF2B5EF4-FFF2-40B4-BE49-F238E27FC236}">
-                <a16:creationId xmlns:a16="http://schemas.microsoft.com/office/drawing/2014/main" id="{35568BC9-BE9F-45DF-5090-CF0558D69CB1}"/>
+                <a16:creationId xmlns:a16="http://schemas.microsoft.com/office/drawing/2014/main" id="{FF623A0F-BA93-3BDD-C3C9-3567B4CD4F85}"/>
               </a:ext>
             </a:extLst>
           </p:cNvPr>
@@ -765,7 +765,7 @@
           <p:cNvPr id="6" name="スライド番号プレースホルダー 5">
             <a:extLst>
               <a:ext uri="{FF2B5EF4-FFF2-40B4-BE49-F238E27FC236}">
-                <a16:creationId xmlns:a16="http://schemas.microsoft.com/office/drawing/2014/main" id="{DE88CC44-739B-B843-6393-D8DE06698FEC}"/>
+                <a16:creationId xmlns:a16="http://schemas.microsoft.com/office/drawing/2014/main" id="{455A9E29-6B17-E42D-965C-7482A816CDB4}"/>
               </a:ext>
             </a:extLst>
           </p:cNvPr>
@@ -781,7 +781,7 @@
           <a:bodyPr/>
           <a:lstStyle/>
           <a:p>
-            <a:fld id="{8017B638-6AA4-4EC8-B58F-4F6FECBF4B10}" type="slidenum">
+            <a:fld id="{EA0B4B91-38E6-45A8-9CBA-F15391A01C9B}" type="slidenum">
               <a:rPr kumimoji="1" lang="ja-JP" altLang="en-US" smtClean="0"/>
               <a:t>‹#›</a:t>
             </a:fld>
@@ -792,7 +792,7 @@
     </p:spTree>
     <p:extLst>
       <p:ext uri="{BB962C8B-B14F-4D97-AF65-F5344CB8AC3E}">
-        <p14:creationId xmlns:p14="http://schemas.microsoft.com/office/powerpoint/2010/main" val="3861372785"/>
+        <p14:creationId xmlns:p14="http://schemas.microsoft.com/office/powerpoint/2010/main" val="3730388"/>
       </p:ext>
     </p:extLst>
   </p:cSld>
@@ -824,7 +824,7 @@
           <p:cNvPr id="2" name="タイトル 1">
             <a:extLst>
               <a:ext uri="{FF2B5EF4-FFF2-40B4-BE49-F238E27FC236}">
-                <a16:creationId xmlns:a16="http://schemas.microsoft.com/office/drawing/2014/main" id="{06F591B0-6AA9-0C2D-D3F6-E8C445466338}"/>
+                <a16:creationId xmlns:a16="http://schemas.microsoft.com/office/drawing/2014/main" id="{1D11B11A-B8D4-46CC-8EA6-EE7F86D17F3A}"/>
               </a:ext>
             </a:extLst>
           </p:cNvPr>
@@ -852,7 +852,7 @@
           <p:cNvPr id="3" name="コンテンツ プレースホルダー 2">
             <a:extLst>
               <a:ext uri="{FF2B5EF4-FFF2-40B4-BE49-F238E27FC236}">
-                <a16:creationId xmlns:a16="http://schemas.microsoft.com/office/drawing/2014/main" id="{FF4E5E51-AFCC-09F2-1F1B-9DB1FD3C8527}"/>
+                <a16:creationId xmlns:a16="http://schemas.microsoft.com/office/drawing/2014/main" id="{FE0C1CDD-7CEF-2703-C00C-C88A02B1CF1D}"/>
               </a:ext>
             </a:extLst>
           </p:cNvPr>
@@ -941,7 +941,7 @@
           <p:cNvPr id="4" name="日付プレースホルダー 3">
             <a:extLst>
               <a:ext uri="{FF2B5EF4-FFF2-40B4-BE49-F238E27FC236}">
-                <a16:creationId xmlns:a16="http://schemas.microsoft.com/office/drawing/2014/main" id="{509FC4B4-8271-70F3-D755-5B610613AEDE}"/>
+                <a16:creationId xmlns:a16="http://schemas.microsoft.com/office/drawing/2014/main" id="{3019BA8A-A6C4-DCE6-BBC7-367AB20A9672}"/>
               </a:ext>
             </a:extLst>
           </p:cNvPr>
@@ -957,7 +957,7 @@
           <a:bodyPr/>
           <a:lstStyle/>
           <a:p>
-            <a:fld id="{9686651F-D23F-440B-9D90-092396846997}" type="datetimeFigureOut">
+            <a:fld id="{0D330DDB-BE35-4E13-B23E-AA6D7DFAD045}" type="datetimeFigureOut">
               <a:rPr kumimoji="1" lang="ja-JP" altLang="en-US" smtClean="0"/>
               <a:t>2026/7/30</a:t>
             </a:fld>
@@ -970,7 +970,7 @@
           <p:cNvPr id="5" name="フッター プレースホルダー 4">
             <a:extLst>
               <a:ext uri="{FF2B5EF4-FFF2-40B4-BE49-F238E27FC236}">
-                <a16:creationId xmlns:a16="http://schemas.microsoft.com/office/drawing/2014/main" id="{B3441FC4-ED24-BB85-9409-E04B86CCDAAA}"/>
+                <a16:creationId xmlns:a16="http://schemas.microsoft.com/office/drawing/2014/main" id="{1129916A-3771-2615-61F1-1524B3C91EA2}"/>
               </a:ext>
             </a:extLst>
           </p:cNvPr>
@@ -995,7 +995,7 @@
           <p:cNvPr id="6" name="スライド番号プレースホルダー 5">
             <a:extLst>
               <a:ext uri="{FF2B5EF4-FFF2-40B4-BE49-F238E27FC236}">
-                <a16:creationId xmlns:a16="http://schemas.microsoft.com/office/drawing/2014/main" id="{A2FB8778-80C7-8FEA-9614-5555FE3280FE}"/>
+                <a16:creationId xmlns:a16="http://schemas.microsoft.com/office/drawing/2014/main" id="{714B1141-8327-ACBC-9E77-7E9980F70DEA}"/>
               </a:ext>
             </a:extLst>
           </p:cNvPr>
@@ -1011,7 +1011,7 @@
           <a:bodyPr/>
           <a:lstStyle/>
           <a:p>
-            <a:fld id="{8017B638-6AA4-4EC8-B58F-4F6FECBF4B10}" type="slidenum">
+            <a:fld id="{EA0B4B91-38E6-45A8-9CBA-F15391A01C9B}" type="slidenum">
               <a:rPr kumimoji="1" lang="ja-JP" altLang="en-US" smtClean="0"/>
               <a:t>‹#›</a:t>
             </a:fld>
@@ -1022,7 +1022,7 @@
     </p:spTree>
     <p:extLst>
       <p:ext uri="{BB962C8B-B14F-4D97-AF65-F5344CB8AC3E}">
-        <p14:creationId xmlns:p14="http://schemas.microsoft.com/office/powerpoint/2010/main" val="1463915528"/>
+        <p14:creationId xmlns:p14="http://schemas.microsoft.com/office/powerpoint/2010/main" val="700312884"/>
       </p:ext>
     </p:extLst>
   </p:cSld>
@@ -1054,7 +1054,7 @@
           <p:cNvPr id="2" name="タイトル 1">
             <a:extLst>
               <a:ext uri="{FF2B5EF4-FFF2-40B4-BE49-F238E27FC236}">
-                <a16:creationId xmlns:a16="http://schemas.microsoft.com/office/drawing/2014/main" id="{AF42A5AE-C5A7-0F2A-86DC-5964D21BABBB}"/>
+                <a16:creationId xmlns:a16="http://schemas.microsoft.com/office/drawing/2014/main" id="{30804962-2F14-A4B1-AA92-8727974FB4B2}"/>
               </a:ext>
             </a:extLst>
           </p:cNvPr>
@@ -1091,7 +1091,7 @@
           <p:cNvPr id="3" name="テキスト プレースホルダー 2">
             <a:extLst>
               <a:ext uri="{FF2B5EF4-FFF2-40B4-BE49-F238E27FC236}">
-                <a16:creationId xmlns:a16="http://schemas.microsoft.com/office/drawing/2014/main" id="{7E5C4FEF-3156-421D-4208-2DA1706D6411}"/>
+                <a16:creationId xmlns:a16="http://schemas.microsoft.com/office/drawing/2014/main" id="{47849D4F-04B2-D3DA-0E7A-53A0C66341F7}"/>
               </a:ext>
             </a:extLst>
           </p:cNvPr>
@@ -1216,7 +1216,7 @@
           <p:cNvPr id="4" name="日付プレースホルダー 3">
             <a:extLst>
               <a:ext uri="{FF2B5EF4-FFF2-40B4-BE49-F238E27FC236}">
-                <a16:creationId xmlns:a16="http://schemas.microsoft.com/office/drawing/2014/main" id="{3397E824-1575-F6A1-96FD-5DD2845A9B60}"/>
+                <a16:creationId xmlns:a16="http://schemas.microsoft.com/office/drawing/2014/main" id="{E698B2F9-918C-7659-341E-0B5A7E0B5EF9}"/>
               </a:ext>
             </a:extLst>
           </p:cNvPr>
@@ -1232,7 +1232,7 @@
           <a:bodyPr/>
           <a:lstStyle/>
           <a:p>
-            <a:fld id="{9686651F-D23F-440B-9D90-092396846997}" type="datetimeFigureOut">
+            <a:fld id="{0D330DDB-BE35-4E13-B23E-AA6D7DFAD045}" type="datetimeFigureOut">
               <a:rPr kumimoji="1" lang="ja-JP" altLang="en-US" smtClean="0"/>
               <a:t>2026/7/30</a:t>
             </a:fld>
@@ -1245,7 +1245,7 @@
           <p:cNvPr id="5" name="フッター プレースホルダー 4">
             <a:extLst>
               <a:ext uri="{FF2B5EF4-FFF2-40B4-BE49-F238E27FC236}">
-                <a16:creationId xmlns:a16="http://schemas.microsoft.com/office/drawing/2014/main" id="{7C653839-7B85-D568-35A8-81CEC6CC1B79}"/>
+                <a16:creationId xmlns:a16="http://schemas.microsoft.com/office/drawing/2014/main" id="{BF329F88-C00E-EFB1-44BC-508EF9D7BB46}"/>
               </a:ext>
             </a:extLst>
           </p:cNvPr>
@@ -1270,7 +1270,7 @@
           <p:cNvPr id="6" name="スライド番号プレースホルダー 5">
             <a:extLst>
               <a:ext uri="{FF2B5EF4-FFF2-40B4-BE49-F238E27FC236}">
-                <a16:creationId xmlns:a16="http://schemas.microsoft.com/office/drawing/2014/main" id="{0817B068-93B1-6E2C-7E74-F20C4F718977}"/>
+                <a16:creationId xmlns:a16="http://schemas.microsoft.com/office/drawing/2014/main" id="{3BBA6EE4-4A6F-C24A-C65A-BE9C7AAA2357}"/>
               </a:ext>
             </a:extLst>
           </p:cNvPr>
@@ -1286,7 +1286,7 @@
           <a:bodyPr/>
           <a:lstStyle/>
           <a:p>
-            <a:fld id="{8017B638-6AA4-4EC8-B58F-4F6FECBF4B10}" type="slidenum">
+            <a:fld id="{EA0B4B91-38E6-45A8-9CBA-F15391A01C9B}" type="slidenum">
               <a:rPr kumimoji="1" lang="ja-JP" altLang="en-US" smtClean="0"/>
               <a:t>‹#›</a:t>
             </a:fld>
@@ -1297,7 +1297,7 @@
     </p:spTree>
     <p:extLst>
       <p:ext uri="{BB962C8B-B14F-4D97-AF65-F5344CB8AC3E}">
-        <p14:creationId xmlns:p14="http://schemas.microsoft.com/office/powerpoint/2010/main" val="4159655102"/>
+        <p14:creationId xmlns:p14="http://schemas.microsoft.com/office/powerpoint/2010/main" val="3236675314"/>
       </p:ext>
     </p:extLst>
   </p:cSld>
@@ -1329,7 +1329,7 @@
           <p:cNvPr id="2" name="タイトル 1">
             <a:extLst>
               <a:ext uri="{FF2B5EF4-FFF2-40B4-BE49-F238E27FC236}">
-                <a16:creationId xmlns:a16="http://schemas.microsoft.com/office/drawing/2014/main" id="{1B6CC67E-9D76-E5F7-786A-A3E70724C44D}"/>
+                <a16:creationId xmlns:a16="http://schemas.microsoft.com/office/drawing/2014/main" id="{30ECA783-3A96-FAC9-E253-80AEE5926D6D}"/>
               </a:ext>
             </a:extLst>
           </p:cNvPr>
@@ -1357,7 +1357,7 @@
           <p:cNvPr id="3" name="コンテンツ プレースホルダー 2">
             <a:extLst>
               <a:ext uri="{FF2B5EF4-FFF2-40B4-BE49-F238E27FC236}">
-                <a16:creationId xmlns:a16="http://schemas.microsoft.com/office/drawing/2014/main" id="{1436E243-7904-F709-C7E3-C9A88E9A98F3}"/>
+                <a16:creationId xmlns:a16="http://schemas.microsoft.com/office/drawing/2014/main" id="{1D74B2B6-498F-2706-9E18-F3DC522362FA}"/>
               </a:ext>
             </a:extLst>
           </p:cNvPr>
@@ -1451,7 +1451,7 @@
           <p:cNvPr id="4" name="コンテンツ プレースホルダー 3">
             <a:extLst>
               <a:ext uri="{FF2B5EF4-FFF2-40B4-BE49-F238E27FC236}">
-                <a16:creationId xmlns:a16="http://schemas.microsoft.com/office/drawing/2014/main" id="{686D145E-0630-78B4-DD8D-C4AC3AEF2E53}"/>
+                <a16:creationId xmlns:a16="http://schemas.microsoft.com/office/drawing/2014/main" id="{85131160-0E64-3142-2313-591A61CE9FD8}"/>
               </a:ext>
             </a:extLst>
           </p:cNvPr>
@@ -1545,7 +1545,7 @@
           <p:cNvPr id="5" name="日付プレースホルダー 4">
             <a:extLst>
               <a:ext uri="{FF2B5EF4-FFF2-40B4-BE49-F238E27FC236}">
-                <a16:creationId xmlns:a16="http://schemas.microsoft.com/office/drawing/2014/main" id="{B7A59BF9-FB47-2927-E3A0-2531CD74F0C8}"/>
+                <a16:creationId xmlns:a16="http://schemas.microsoft.com/office/drawing/2014/main" id="{F6732A14-1B62-C89C-FB40-36E747FC4810}"/>
               </a:ext>
             </a:extLst>
           </p:cNvPr>
@@ -1561,7 +1561,7 @@
           <a:bodyPr/>
           <a:lstStyle/>
           <a:p>
-            <a:fld id="{9686651F-D23F-440B-9D90-092396846997}" type="datetimeFigureOut">
+            <a:fld id="{0D330DDB-BE35-4E13-B23E-AA6D7DFAD045}" type="datetimeFigureOut">
               <a:rPr kumimoji="1" lang="ja-JP" altLang="en-US" smtClean="0"/>
               <a:t>2026/7/30</a:t>
             </a:fld>
@@ -1574,7 +1574,7 @@
           <p:cNvPr id="6" name="フッター プレースホルダー 5">
             <a:extLst>
               <a:ext uri="{FF2B5EF4-FFF2-40B4-BE49-F238E27FC236}">
-                <a16:creationId xmlns:a16="http://schemas.microsoft.com/office/drawing/2014/main" id="{1C783C33-9CC8-3EE8-5ED9-C8350DD0E9CE}"/>
+                <a16:creationId xmlns:a16="http://schemas.microsoft.com/office/drawing/2014/main" id="{6340D9DA-2AB6-227B-3DC5-DCD7EE029651}"/>
               </a:ext>
             </a:extLst>
           </p:cNvPr>
@@ -1599,7 +1599,7 @@
           <p:cNvPr id="7" name="スライド番号プレースホルダー 6">
             <a:extLst>
               <a:ext uri="{FF2B5EF4-FFF2-40B4-BE49-F238E27FC236}">
-                <a16:creationId xmlns:a16="http://schemas.microsoft.com/office/drawing/2014/main" id="{26D53206-3F94-7846-5FC0-026A92D50A7F}"/>
+                <a16:creationId xmlns:a16="http://schemas.microsoft.com/office/drawing/2014/main" id="{B08F8991-9CB1-4C08-9CC2-26E262545BC7}"/>
               </a:ext>
             </a:extLst>
           </p:cNvPr>
@@ -1615,7 +1615,7 @@
           <a:bodyPr/>
           <a:lstStyle/>
           <a:p>
-            <a:fld id="{8017B638-6AA4-4EC8-B58F-4F6FECBF4B10}" type="slidenum">
+            <a:fld id="{EA0B4B91-38E6-45A8-9CBA-F15391A01C9B}" type="slidenum">
               <a:rPr kumimoji="1" lang="ja-JP" altLang="en-US" smtClean="0"/>
               <a:t>‹#›</a:t>
             </a:fld>
@@ -1626,7 +1626,7 @@
     </p:spTree>
     <p:extLst>
       <p:ext uri="{BB962C8B-B14F-4D97-AF65-F5344CB8AC3E}">
-        <p14:creationId xmlns:p14="http://schemas.microsoft.com/office/powerpoint/2010/main" val="193851600"/>
+        <p14:creationId xmlns:p14="http://schemas.microsoft.com/office/powerpoint/2010/main" val="1267389340"/>
       </p:ext>
     </p:extLst>
   </p:cSld>
@@ -1658,7 +1658,7 @@
           <p:cNvPr id="2" name="タイトル 1">
             <a:extLst>
               <a:ext uri="{FF2B5EF4-FFF2-40B4-BE49-F238E27FC236}">
-                <a16:creationId xmlns:a16="http://schemas.microsoft.com/office/drawing/2014/main" id="{DD25C92D-0A1C-7630-3286-0AF3BBFBEB88}"/>
+                <a16:creationId xmlns:a16="http://schemas.microsoft.com/office/drawing/2014/main" id="{82D0C51E-1842-0191-09F6-AC48F7E528FC}"/>
               </a:ext>
             </a:extLst>
           </p:cNvPr>
@@ -1691,7 +1691,7 @@
           <p:cNvPr id="3" name="テキスト プレースホルダー 2">
             <a:extLst>
               <a:ext uri="{FF2B5EF4-FFF2-40B4-BE49-F238E27FC236}">
-                <a16:creationId xmlns:a16="http://schemas.microsoft.com/office/drawing/2014/main" id="{0353E8B3-E499-9A47-D940-72306A0ED892}"/>
+                <a16:creationId xmlns:a16="http://schemas.microsoft.com/office/drawing/2014/main" id="{D60DD70F-BDA0-AFDA-6866-7EC9B2616950}"/>
               </a:ext>
             </a:extLst>
           </p:cNvPr>
@@ -1762,7 +1762,7 @@
           <p:cNvPr id="4" name="コンテンツ プレースホルダー 3">
             <a:extLst>
               <a:ext uri="{FF2B5EF4-FFF2-40B4-BE49-F238E27FC236}">
-                <a16:creationId xmlns:a16="http://schemas.microsoft.com/office/drawing/2014/main" id="{E668B4F6-9440-CDF7-D021-5EB8D97EE60C}"/>
+                <a16:creationId xmlns:a16="http://schemas.microsoft.com/office/drawing/2014/main" id="{F75FF800-4644-E442-2278-6BA77C8646D0}"/>
               </a:ext>
             </a:extLst>
           </p:cNvPr>
@@ -1856,7 +1856,7 @@
           <p:cNvPr id="5" name="テキスト プレースホルダー 4">
             <a:extLst>
               <a:ext uri="{FF2B5EF4-FFF2-40B4-BE49-F238E27FC236}">
-                <a16:creationId xmlns:a16="http://schemas.microsoft.com/office/drawing/2014/main" id="{F6B2DE2B-BF80-BB84-5A63-E3721E3972EE}"/>
+                <a16:creationId xmlns:a16="http://schemas.microsoft.com/office/drawing/2014/main" id="{566E6265-4880-EC7C-69FA-CECFE1916A65}"/>
               </a:ext>
             </a:extLst>
           </p:cNvPr>
@@ -1927,7 +1927,7 @@
           <p:cNvPr id="6" name="コンテンツ プレースホルダー 5">
             <a:extLst>
               <a:ext uri="{FF2B5EF4-FFF2-40B4-BE49-F238E27FC236}">
-                <a16:creationId xmlns:a16="http://schemas.microsoft.com/office/drawing/2014/main" id="{1A6454D5-2534-2CBB-CCCF-85F2C085F310}"/>
+                <a16:creationId xmlns:a16="http://schemas.microsoft.com/office/drawing/2014/main" id="{99CB64B6-14E3-C7EF-06B0-BBBD611FDD62}"/>
               </a:ext>
             </a:extLst>
           </p:cNvPr>
@@ -2021,7 +2021,7 @@
           <p:cNvPr id="7" name="日付プレースホルダー 6">
             <a:extLst>
               <a:ext uri="{FF2B5EF4-FFF2-40B4-BE49-F238E27FC236}">
-                <a16:creationId xmlns:a16="http://schemas.microsoft.com/office/drawing/2014/main" id="{BCD70659-17FF-8B6D-6D49-75A78116FE55}"/>
+                <a16:creationId xmlns:a16="http://schemas.microsoft.com/office/drawing/2014/main" id="{7CDE2E08-36E6-051B-7630-C0F1416832C5}"/>
               </a:ext>
             </a:extLst>
           </p:cNvPr>
@@ -2037,7 +2037,7 @@
           <a:bodyPr/>
           <a:lstStyle/>
           <a:p>
-            <a:fld id="{9686651F-D23F-440B-9D90-092396846997}" type="datetimeFigureOut">
+            <a:fld id="{0D330DDB-BE35-4E13-B23E-AA6D7DFAD045}" type="datetimeFigureOut">
               <a:rPr kumimoji="1" lang="ja-JP" altLang="en-US" smtClean="0"/>
               <a:t>2026/7/30</a:t>
             </a:fld>
@@ -2050,7 +2050,7 @@
           <p:cNvPr id="8" name="フッター プレースホルダー 7">
             <a:extLst>
               <a:ext uri="{FF2B5EF4-FFF2-40B4-BE49-F238E27FC236}">
-                <a16:creationId xmlns:a16="http://schemas.microsoft.com/office/drawing/2014/main" id="{AAE05B66-D907-9FC6-A919-CBF9C4D3E9C6}"/>
+                <a16:creationId xmlns:a16="http://schemas.microsoft.com/office/drawing/2014/main" id="{5E8485B8-6DD8-7D63-E060-1BC20BEA0528}"/>
               </a:ext>
             </a:extLst>
           </p:cNvPr>
@@ -2075,7 +2075,7 @@
           <p:cNvPr id="9" name="スライド番号プレースホルダー 8">
             <a:extLst>
               <a:ext uri="{FF2B5EF4-FFF2-40B4-BE49-F238E27FC236}">
-                <a16:creationId xmlns:a16="http://schemas.microsoft.com/office/drawing/2014/main" id="{990D6254-3EC9-DF08-D466-A9F6DE5ADAEF}"/>
+                <a16:creationId xmlns:a16="http://schemas.microsoft.com/office/drawing/2014/main" id="{1D064FB9-B586-CE91-2CFA-4EAA335E8503}"/>
               </a:ext>
             </a:extLst>
           </p:cNvPr>
@@ -2091,7 +2091,7 @@
           <a:bodyPr/>
           <a:lstStyle/>
           <a:p>
-            <a:fld id="{8017B638-6AA4-4EC8-B58F-4F6FECBF4B10}" type="slidenum">
+            <a:fld id="{EA0B4B91-38E6-45A8-9CBA-F15391A01C9B}" type="slidenum">
               <a:rPr kumimoji="1" lang="ja-JP" altLang="en-US" smtClean="0"/>
               <a:t>‹#›</a:t>
             </a:fld>
@@ -2102,7 +2102,7 @@
     </p:spTree>
     <p:extLst>
       <p:ext uri="{BB962C8B-B14F-4D97-AF65-F5344CB8AC3E}">
-        <p14:creationId xmlns:p14="http://schemas.microsoft.com/office/powerpoint/2010/main" val="2853960634"/>
+        <p14:creationId xmlns:p14="http://schemas.microsoft.com/office/powerpoint/2010/main" val="3451490305"/>
       </p:ext>
     </p:extLst>
   </p:cSld>
@@ -2134,7 +2134,7 @@
           <p:cNvPr id="2" name="タイトル 1">
             <a:extLst>
               <a:ext uri="{FF2B5EF4-FFF2-40B4-BE49-F238E27FC236}">
-                <a16:creationId xmlns:a16="http://schemas.microsoft.com/office/drawing/2014/main" id="{9DEEF26D-B948-FBDE-7537-78219D91A05F}"/>
+                <a16:creationId xmlns:a16="http://schemas.microsoft.com/office/drawing/2014/main" id="{D6062124-455B-91A9-2BFA-494872A6A2B5}"/>
               </a:ext>
             </a:extLst>
           </p:cNvPr>
@@ -2162,7 +2162,7 @@
           <p:cNvPr id="3" name="日付プレースホルダー 2">
             <a:extLst>
               <a:ext uri="{FF2B5EF4-FFF2-40B4-BE49-F238E27FC236}">
-                <a16:creationId xmlns:a16="http://schemas.microsoft.com/office/drawing/2014/main" id="{3E85B196-56E4-A307-D5F8-074C6FFED365}"/>
+                <a16:creationId xmlns:a16="http://schemas.microsoft.com/office/drawing/2014/main" id="{1048D21C-8DC5-B600-6389-B1CA48956659}"/>
               </a:ext>
             </a:extLst>
           </p:cNvPr>
@@ -2178,7 +2178,7 @@
           <a:bodyPr/>
           <a:lstStyle/>
           <a:p>
-            <a:fld id="{9686651F-D23F-440B-9D90-092396846997}" type="datetimeFigureOut">
+            <a:fld id="{0D330DDB-BE35-4E13-B23E-AA6D7DFAD045}" type="datetimeFigureOut">
               <a:rPr kumimoji="1" lang="ja-JP" altLang="en-US" smtClean="0"/>
               <a:t>2026/7/30</a:t>
             </a:fld>
@@ -2191,7 +2191,7 @@
           <p:cNvPr id="4" name="フッター プレースホルダー 3">
             <a:extLst>
               <a:ext uri="{FF2B5EF4-FFF2-40B4-BE49-F238E27FC236}">
-                <a16:creationId xmlns:a16="http://schemas.microsoft.com/office/drawing/2014/main" id="{69FEE58B-D0D6-B58A-FE94-397C191D81C9}"/>
+                <a16:creationId xmlns:a16="http://schemas.microsoft.com/office/drawing/2014/main" id="{8CD54412-6D58-FBFC-9A84-A1349585E35D}"/>
               </a:ext>
             </a:extLst>
           </p:cNvPr>
@@ -2216,7 +2216,7 @@
           <p:cNvPr id="5" name="スライド番号プレースホルダー 4">
             <a:extLst>
               <a:ext uri="{FF2B5EF4-FFF2-40B4-BE49-F238E27FC236}">
-                <a16:creationId xmlns:a16="http://schemas.microsoft.com/office/drawing/2014/main" id="{D979806B-A226-8B58-791E-B1428CC9C2BC}"/>
+                <a16:creationId xmlns:a16="http://schemas.microsoft.com/office/drawing/2014/main" id="{AB133B6D-D56D-E759-B165-A2DD18F57888}"/>
               </a:ext>
             </a:extLst>
           </p:cNvPr>
@@ -2232,7 +2232,7 @@
           <a:bodyPr/>
           <a:lstStyle/>
           <a:p>
-            <a:fld id="{8017B638-6AA4-4EC8-B58F-4F6FECBF4B10}" type="slidenum">
+            <a:fld id="{EA0B4B91-38E6-45A8-9CBA-F15391A01C9B}" type="slidenum">
               <a:rPr kumimoji="1" lang="ja-JP" altLang="en-US" smtClean="0"/>
               <a:t>‹#›</a:t>
             </a:fld>
@@ -2243,7 +2243,7 @@
     </p:spTree>
     <p:extLst>
       <p:ext uri="{BB962C8B-B14F-4D97-AF65-F5344CB8AC3E}">
-        <p14:creationId xmlns:p14="http://schemas.microsoft.com/office/powerpoint/2010/main" val="753230271"/>
+        <p14:creationId xmlns:p14="http://schemas.microsoft.com/office/powerpoint/2010/main" val="2239601473"/>
       </p:ext>
     </p:extLst>
   </p:cSld>
@@ -2275,7 +2275,7 @@
           <p:cNvPr id="2" name="日付プレースホルダー 1">
             <a:extLst>
               <a:ext uri="{FF2B5EF4-FFF2-40B4-BE49-F238E27FC236}">
-                <a16:creationId xmlns:a16="http://schemas.microsoft.com/office/drawing/2014/main" id="{9F581388-92C3-C3FA-7E8A-388B8DEC6FC2}"/>
+                <a16:creationId xmlns:a16="http://schemas.microsoft.com/office/drawing/2014/main" id="{AFCA44C3-24BC-BBD8-1E76-A72F65F04361}"/>
               </a:ext>
             </a:extLst>
           </p:cNvPr>
@@ -2291,7 +2291,7 @@
           <a:bodyPr/>
           <a:lstStyle/>
           <a:p>
-            <a:fld id="{9686651F-D23F-440B-9D90-092396846997}" type="datetimeFigureOut">
+            <a:fld id="{0D330DDB-BE35-4E13-B23E-AA6D7DFAD045}" type="datetimeFigureOut">
               <a:rPr kumimoji="1" lang="ja-JP" altLang="en-US" smtClean="0"/>
               <a:t>2026/7/30</a:t>
             </a:fld>
@@ -2304,7 +2304,7 @@
           <p:cNvPr id="3" name="フッター プレースホルダー 2">
             <a:extLst>
               <a:ext uri="{FF2B5EF4-FFF2-40B4-BE49-F238E27FC236}">
-                <a16:creationId xmlns:a16="http://schemas.microsoft.com/office/drawing/2014/main" id="{5CF8EAD6-1284-4F5F-55F7-1E992BE41A61}"/>
+                <a16:creationId xmlns:a16="http://schemas.microsoft.com/office/drawing/2014/main" id="{0DFEC458-47B8-A3C7-47B2-A75B098BCCCA}"/>
               </a:ext>
             </a:extLst>
           </p:cNvPr>
@@ -2329,7 +2329,7 @@
           <p:cNvPr id="4" name="スライド番号プレースホルダー 3">
             <a:extLst>
               <a:ext uri="{FF2B5EF4-FFF2-40B4-BE49-F238E27FC236}">
-                <a16:creationId xmlns:a16="http://schemas.microsoft.com/office/drawing/2014/main" id="{8037A8AE-CD02-4C9D-6A53-FB4A626F868A}"/>
+                <a16:creationId xmlns:a16="http://schemas.microsoft.com/office/drawing/2014/main" id="{67BE365B-3C96-C7C2-7C57-D87A20928EE7}"/>
               </a:ext>
             </a:extLst>
           </p:cNvPr>
@@ -2345,7 +2345,7 @@
           <a:bodyPr/>
           <a:lstStyle/>
           <a:p>
-            <a:fld id="{8017B638-6AA4-4EC8-B58F-4F6FECBF4B10}" type="slidenum">
+            <a:fld id="{EA0B4B91-38E6-45A8-9CBA-F15391A01C9B}" type="slidenum">
               <a:rPr kumimoji="1" lang="ja-JP" altLang="en-US" smtClean="0"/>
               <a:t>‹#›</a:t>
             </a:fld>
@@ -2356,7 +2356,7 @@
     </p:spTree>
     <p:extLst>
       <p:ext uri="{BB962C8B-B14F-4D97-AF65-F5344CB8AC3E}">
-        <p14:creationId xmlns:p14="http://schemas.microsoft.com/office/powerpoint/2010/main" val="1305332793"/>
+        <p14:creationId xmlns:p14="http://schemas.microsoft.com/office/powerpoint/2010/main" val="1560793904"/>
       </p:ext>
     </p:extLst>
   </p:cSld>
@@ -2388,7 +2388,7 @@
           <p:cNvPr id="2" name="タイトル 1">
             <a:extLst>
               <a:ext uri="{FF2B5EF4-FFF2-40B4-BE49-F238E27FC236}">
-                <a16:creationId xmlns:a16="http://schemas.microsoft.com/office/drawing/2014/main" id="{235209C1-05F9-145E-AD6C-C26431EDAB60}"/>
+                <a16:creationId xmlns:a16="http://schemas.microsoft.com/office/drawing/2014/main" id="{52233544-4F49-C34D-C971-75E3DF7EF665}"/>
               </a:ext>
             </a:extLst>
           </p:cNvPr>
@@ -2425,7 +2425,7 @@
           <p:cNvPr id="3" name="コンテンツ プレースホルダー 2">
             <a:extLst>
               <a:ext uri="{FF2B5EF4-FFF2-40B4-BE49-F238E27FC236}">
-                <a16:creationId xmlns:a16="http://schemas.microsoft.com/office/drawing/2014/main" id="{3CC0FF82-85E6-D1C4-2030-1B2AEA886093}"/>
+                <a16:creationId xmlns:a16="http://schemas.microsoft.com/office/drawing/2014/main" id="{DF08AD57-9A1C-52CD-6FA5-05189FD12076}"/>
               </a:ext>
             </a:extLst>
           </p:cNvPr>
@@ -2547,7 +2547,7 @@
           <p:cNvPr id="4" name="テキスト プレースホルダー 3">
             <a:extLst>
               <a:ext uri="{FF2B5EF4-FFF2-40B4-BE49-F238E27FC236}">
-                <a16:creationId xmlns:a16="http://schemas.microsoft.com/office/drawing/2014/main" id="{AD91C49C-BE82-5836-220B-5F8E2084BBDD}"/>
+                <a16:creationId xmlns:a16="http://schemas.microsoft.com/office/drawing/2014/main" id="{1F33FBBF-06A5-1C10-CF6A-56A699334E15}"/>
               </a:ext>
             </a:extLst>
           </p:cNvPr>
@@ -2618,7 +2618,7 @@
           <p:cNvPr id="5" name="日付プレースホルダー 4">
             <a:extLst>
               <a:ext uri="{FF2B5EF4-FFF2-40B4-BE49-F238E27FC236}">
-                <a16:creationId xmlns:a16="http://schemas.microsoft.com/office/drawing/2014/main" id="{A54FEDA0-C0FC-D20F-2174-34DB3F1E4D58}"/>
+                <a16:creationId xmlns:a16="http://schemas.microsoft.com/office/drawing/2014/main" id="{15E70069-464F-D264-5337-CDD76899CC6C}"/>
               </a:ext>
             </a:extLst>
           </p:cNvPr>
@@ -2634,7 +2634,7 @@
           <a:bodyPr/>
           <a:lstStyle/>
           <a:p>
-            <a:fld id="{9686651F-D23F-440B-9D90-092396846997}" type="datetimeFigureOut">
+            <a:fld id="{0D330DDB-BE35-4E13-B23E-AA6D7DFAD045}" type="datetimeFigureOut">
               <a:rPr kumimoji="1" lang="ja-JP" altLang="en-US" smtClean="0"/>
               <a:t>2026/7/30</a:t>
             </a:fld>
@@ -2647,7 +2647,7 @@
           <p:cNvPr id="6" name="フッター プレースホルダー 5">
             <a:extLst>
               <a:ext uri="{FF2B5EF4-FFF2-40B4-BE49-F238E27FC236}">
-                <a16:creationId xmlns:a16="http://schemas.microsoft.com/office/drawing/2014/main" id="{11D9E4AF-5B6E-18AC-0B4B-2F7B25B72AC3}"/>
+                <a16:creationId xmlns:a16="http://schemas.microsoft.com/office/drawing/2014/main" id="{D9584BA6-0687-6C55-2271-FA20723829B2}"/>
               </a:ext>
             </a:extLst>
           </p:cNvPr>
@@ -2672,7 +2672,7 @@
           <p:cNvPr id="7" name="スライド番号プレースホルダー 6">
             <a:extLst>
               <a:ext uri="{FF2B5EF4-FFF2-40B4-BE49-F238E27FC236}">
-                <a16:creationId xmlns:a16="http://schemas.microsoft.com/office/drawing/2014/main" id="{E5B816C0-D47D-93BA-0C9E-3F7B597A30F5}"/>
+                <a16:creationId xmlns:a16="http://schemas.microsoft.com/office/drawing/2014/main" id="{0A84167E-5532-08DF-C67C-64E94CB90866}"/>
               </a:ext>
             </a:extLst>
           </p:cNvPr>
@@ -2688,7 +2688,7 @@
           <a:bodyPr/>
           <a:lstStyle/>
           <a:p>
-            <a:fld id="{8017B638-6AA4-4EC8-B58F-4F6FECBF4B10}" type="slidenum">
+            <a:fld id="{EA0B4B91-38E6-45A8-9CBA-F15391A01C9B}" type="slidenum">
               <a:rPr kumimoji="1" lang="ja-JP" altLang="en-US" smtClean="0"/>
               <a:t>‹#›</a:t>
             </a:fld>
@@ -2699,7 +2699,7 @@
     </p:spTree>
     <p:extLst>
       <p:ext uri="{BB962C8B-B14F-4D97-AF65-F5344CB8AC3E}">
-        <p14:creationId xmlns:p14="http://schemas.microsoft.com/office/powerpoint/2010/main" val="3238815280"/>
+        <p14:creationId xmlns:p14="http://schemas.microsoft.com/office/powerpoint/2010/main" val="1934646369"/>
       </p:ext>
     </p:extLst>
   </p:cSld>
@@ -2731,7 +2731,7 @@
           <p:cNvPr id="2" name="タイトル 1">
             <a:extLst>
               <a:ext uri="{FF2B5EF4-FFF2-40B4-BE49-F238E27FC236}">
-                <a16:creationId xmlns:a16="http://schemas.microsoft.com/office/drawing/2014/main" id="{108EBCAC-8338-BFB4-F9E8-493CCE2AFF13}"/>
+                <a16:creationId xmlns:a16="http://schemas.microsoft.com/office/drawing/2014/main" id="{4FFDC751-E3E4-D810-A8AB-A165BCF036B1}"/>
               </a:ext>
             </a:extLst>
           </p:cNvPr>
@@ -2768,7 +2768,7 @@
           <p:cNvPr id="3" name="図プレースホルダー 2">
             <a:extLst>
               <a:ext uri="{FF2B5EF4-FFF2-40B4-BE49-F238E27FC236}">
-                <a16:creationId xmlns:a16="http://schemas.microsoft.com/office/drawing/2014/main" id="{BE776D5A-9532-9314-21CD-4EC4D2E020FF}"/>
+                <a16:creationId xmlns:a16="http://schemas.microsoft.com/office/drawing/2014/main" id="{3C85AE25-B295-B856-8975-427997F842C4}"/>
               </a:ext>
             </a:extLst>
           </p:cNvPr>
@@ -2835,7 +2835,7 @@
           <p:cNvPr id="4" name="テキスト プレースホルダー 3">
             <a:extLst>
               <a:ext uri="{FF2B5EF4-FFF2-40B4-BE49-F238E27FC236}">
-                <a16:creationId xmlns:a16="http://schemas.microsoft.com/office/drawing/2014/main" id="{B30E0FC2-63B8-5CF3-719E-CBC83AE52EEF}"/>
+                <a16:creationId xmlns:a16="http://schemas.microsoft.com/office/drawing/2014/main" id="{6079F99A-D3DB-BABD-365E-836017465485}"/>
               </a:ext>
             </a:extLst>
           </p:cNvPr>
@@ -2906,7 +2906,7 @@
           <p:cNvPr id="5" name="日付プレースホルダー 4">
             <a:extLst>
               <a:ext uri="{FF2B5EF4-FFF2-40B4-BE49-F238E27FC236}">
-                <a16:creationId xmlns:a16="http://schemas.microsoft.com/office/drawing/2014/main" id="{86070A9A-B2FD-9BBD-27F6-AE4A53A8D45A}"/>
+                <a16:creationId xmlns:a16="http://schemas.microsoft.com/office/drawing/2014/main" id="{80013E67-79B7-EB78-48F7-F9BE1739AAE5}"/>
               </a:ext>
             </a:extLst>
           </p:cNvPr>
@@ -2922,7 +2922,7 @@
           <a:bodyPr/>
           <a:lstStyle/>
           <a:p>
-            <a:fld id="{9686651F-D23F-440B-9D90-092396846997}" type="datetimeFigureOut">
+            <a:fld id="{0D330DDB-BE35-4E13-B23E-AA6D7DFAD045}" type="datetimeFigureOut">
               <a:rPr kumimoji="1" lang="ja-JP" altLang="en-US" smtClean="0"/>
               <a:t>2026/7/30</a:t>
             </a:fld>
@@ -2935,7 +2935,7 @@
           <p:cNvPr id="6" name="フッター プレースホルダー 5">
             <a:extLst>
               <a:ext uri="{FF2B5EF4-FFF2-40B4-BE49-F238E27FC236}">
-                <a16:creationId xmlns:a16="http://schemas.microsoft.com/office/drawing/2014/main" id="{E6FEAB89-8C3E-50D9-9FF3-26930A98F72A}"/>
+                <a16:creationId xmlns:a16="http://schemas.microsoft.com/office/drawing/2014/main" id="{6DC15CE1-EB03-6978-3341-05C6CFEC0DA0}"/>
               </a:ext>
             </a:extLst>
           </p:cNvPr>
@@ -2960,7 +2960,7 @@
           <p:cNvPr id="7" name="スライド番号プレースホルダー 6">
             <a:extLst>
               <a:ext uri="{FF2B5EF4-FFF2-40B4-BE49-F238E27FC236}">
-                <a16:creationId xmlns:a16="http://schemas.microsoft.com/office/drawing/2014/main" id="{551C95BF-BD17-D478-0E76-A7C2017C91E8}"/>
+                <a16:creationId xmlns:a16="http://schemas.microsoft.com/office/drawing/2014/main" id="{F3ACBA54-A988-B6A4-0613-DF7CB90ADBAA}"/>
               </a:ext>
             </a:extLst>
           </p:cNvPr>
@@ -2976,7 +2976,7 @@
           <a:bodyPr/>
           <a:lstStyle/>
           <a:p>
-            <a:fld id="{8017B638-6AA4-4EC8-B58F-4F6FECBF4B10}" type="slidenum">
+            <a:fld id="{EA0B4B91-38E6-45A8-9CBA-F15391A01C9B}" type="slidenum">
               <a:rPr kumimoji="1" lang="ja-JP" altLang="en-US" smtClean="0"/>
               <a:t>‹#›</a:t>
             </a:fld>
@@ -2987,7 +2987,7 @@
     </p:spTree>
     <p:extLst>
       <p:ext uri="{BB962C8B-B14F-4D97-AF65-F5344CB8AC3E}">
-        <p14:creationId xmlns:p14="http://schemas.microsoft.com/office/powerpoint/2010/main" val="3051901055"/>
+        <p14:creationId xmlns:p14="http://schemas.microsoft.com/office/powerpoint/2010/main" val="302949357"/>
       </p:ext>
     </p:extLst>
   </p:cSld>
@@ -3024,7 +3024,7 @@
           <p:cNvPr id="2" name="タイトル プレースホルダー 1">
             <a:extLst>
               <a:ext uri="{FF2B5EF4-FFF2-40B4-BE49-F238E27FC236}">
-                <a16:creationId xmlns:a16="http://schemas.microsoft.com/office/drawing/2014/main" id="{405C696A-7203-0B6C-E466-997663B072FA}"/>
+                <a16:creationId xmlns:a16="http://schemas.microsoft.com/office/drawing/2014/main" id="{15E14B83-647B-C3BB-292E-5EC898B98AF4}"/>
               </a:ext>
             </a:extLst>
           </p:cNvPr>
@@ -3062,7 +3062,7 @@
           <p:cNvPr id="3" name="テキスト プレースホルダー 2">
             <a:extLst>
               <a:ext uri="{FF2B5EF4-FFF2-40B4-BE49-F238E27FC236}">
-                <a16:creationId xmlns:a16="http://schemas.microsoft.com/office/drawing/2014/main" id="{9BFF9B6E-9B74-174A-A96A-C8476060710C}"/>
+                <a16:creationId xmlns:a16="http://schemas.microsoft.com/office/drawing/2014/main" id="{A55C8DB3-C267-3BE8-2047-6EBCA87AA4FA}"/>
               </a:ext>
             </a:extLst>
           </p:cNvPr>
@@ -3161,7 +3161,7 @@
           <p:cNvPr id="4" name="日付プレースホルダー 3">
             <a:extLst>
               <a:ext uri="{FF2B5EF4-FFF2-40B4-BE49-F238E27FC236}">
-                <a16:creationId xmlns:a16="http://schemas.microsoft.com/office/drawing/2014/main" id="{2C46FC6B-CCC9-8F96-F932-C26B6437941F}"/>
+                <a16:creationId xmlns:a16="http://schemas.microsoft.com/office/drawing/2014/main" id="{7F340654-2AEB-CD5A-5AEE-045E19D35C8D}"/>
               </a:ext>
             </a:extLst>
           </p:cNvPr>
@@ -3195,7 +3195,7 @@
             </a:lvl1pPr>
           </a:lstStyle>
           <a:p>
-            <a:fld id="{9686651F-D23F-440B-9D90-092396846997}" type="datetimeFigureOut">
+            <a:fld id="{0D330DDB-BE35-4E13-B23E-AA6D7DFAD045}" type="datetimeFigureOut">
               <a:rPr kumimoji="1" lang="ja-JP" altLang="en-US" smtClean="0"/>
               <a:t>2026/7/30</a:t>
             </a:fld>
@@ -3208,7 +3208,7 @@
           <p:cNvPr id="5" name="フッター プレースホルダー 4">
             <a:extLst>
               <a:ext uri="{FF2B5EF4-FFF2-40B4-BE49-F238E27FC236}">
-                <a16:creationId xmlns:a16="http://schemas.microsoft.com/office/drawing/2014/main" id="{0951BD16-BF38-548E-58FF-3478ACB9E078}"/>
+                <a16:creationId xmlns:a16="http://schemas.microsoft.com/office/drawing/2014/main" id="{97957B23-5DD5-E709-7E3D-2D1DD141D96B}"/>
               </a:ext>
             </a:extLst>
           </p:cNvPr>
@@ -3251,7 +3251,7 @@
           <p:cNvPr id="6" name="スライド番号プレースホルダー 5">
             <a:extLst>
               <a:ext uri="{FF2B5EF4-FFF2-40B4-BE49-F238E27FC236}">
-                <a16:creationId xmlns:a16="http://schemas.microsoft.com/office/drawing/2014/main" id="{0D3280CC-7801-6FF3-830A-A1E8EE71CECF}"/>
+                <a16:creationId xmlns:a16="http://schemas.microsoft.com/office/drawing/2014/main" id="{6F2C69EC-EDA8-3EEC-CC76-4C57DA47D33C}"/>
               </a:ext>
             </a:extLst>
           </p:cNvPr>
@@ -3285,7 +3285,7 @@
             </a:lvl1pPr>
           </a:lstStyle>
           <a:p>
-            <a:fld id="{8017B638-6AA4-4EC8-B58F-4F6FECBF4B10}" type="slidenum">
+            <a:fld id="{EA0B4B91-38E6-45A8-9CBA-F15391A01C9B}" type="slidenum">
               <a:rPr kumimoji="1" lang="ja-JP" altLang="en-US" smtClean="0"/>
               <a:t>‹#›</a:t>
             </a:fld>
@@ -3296,7 +3296,7 @@
     </p:spTree>
     <p:extLst>
       <p:ext uri="{BB962C8B-B14F-4D97-AF65-F5344CB8AC3E}">
-        <p14:creationId xmlns:p14="http://schemas.microsoft.com/office/powerpoint/2010/main" val="961394489"/>
+        <p14:creationId xmlns:p14="http://schemas.microsoft.com/office/powerpoint/2010/main" val="3539126680"/>
       </p:ext>
     </p:extLst>
   </p:cSld>
@@ -3619,7 +3619,7 @@
           <p:cNvPr id="2" name="テキスト ボックス 1">
             <a:extLst>
               <a:ext uri="{FF2B5EF4-FFF2-40B4-BE49-F238E27FC236}">
-                <a16:creationId xmlns:a16="http://schemas.microsoft.com/office/drawing/2014/main" id="{54B6CDB9-468A-8C10-7B4D-32001AC3ECE6}"/>
+                <a16:creationId xmlns:a16="http://schemas.microsoft.com/office/drawing/2014/main" id="{1A7A1F07-6F05-E5BB-202B-90E0C4ACFEE4}"/>
               </a:ext>
             </a:extLst>
           </p:cNvPr>
@@ -3665,7 +3665,7 @@
           <p:cNvPr id="3" name="テキスト ボックス 2">
             <a:extLst>
               <a:ext uri="{FF2B5EF4-FFF2-40B4-BE49-F238E27FC236}">
-                <a16:creationId xmlns:a16="http://schemas.microsoft.com/office/drawing/2014/main" id="{E4489244-C182-1374-5DF1-0C0C58AC9CCA}"/>
+                <a16:creationId xmlns:a16="http://schemas.microsoft.com/office/drawing/2014/main" id="{66D8DFBA-089D-00C8-918A-37D0A4D423D3}"/>
               </a:ext>
             </a:extLst>
           </p:cNvPr>
@@ -3695,14 +3695,17 @@
                 </a:solidFill>
                 <a:latin typeface="Arial" panose="020B0604020202020204" pitchFamily="34" charset="0"/>
               </a:rPr>
-              <a:t>retro-new-games-app TECH EXPLANATION</a:t>
-            </a:r>
-            <a:endParaRPr kumimoji="1" lang="ja-JP" altLang="en-US" sz="3400" b="1">
-              <a:solidFill>
-                <a:srgbClr val="111111"/>
-              </a:solidFill>
-              <a:latin typeface="Arial" panose="020B0604020202020204" pitchFamily="34" charset="0"/>
-            </a:endParaRPr>
+              <a:t>Retro New Games App</a:t>
+            </a:r>
+            <a:r>
+              <a:rPr kumimoji="1" lang="ja-JP" altLang="en-US" sz="3400" b="1">
+                <a:solidFill>
+                  <a:srgbClr val="111111"/>
+                </a:solidFill>
+                <a:latin typeface="Arial" panose="020B0604020202020204" pitchFamily="34" charset="0"/>
+              </a:rPr>
+              <a:t>の技術解説</a:t>
+            </a:r>
           </a:p>
         </p:txBody>
       </p:sp>
@@ -3711,7 +3714,7 @@
           <p:cNvPr id="4" name="テキスト ボックス 3">
             <a:extLst>
               <a:ext uri="{FF2B5EF4-FFF2-40B4-BE49-F238E27FC236}">
-                <a16:creationId xmlns:a16="http://schemas.microsoft.com/office/drawing/2014/main" id="{7EDA88B4-43A3-F5FA-9A9A-22B62F9C6A17}"/>
+                <a16:creationId xmlns:a16="http://schemas.microsoft.com/office/drawing/2014/main" id="{3272AB4F-BD85-8706-D738-FFAD3DE13C03}"/>
               </a:ext>
             </a:extLst>
           </p:cNvPr>
@@ -3735,20 +3738,14 @@
           <a:lstStyle/>
           <a:p>
             <a:r>
-              <a:rPr kumimoji="1" lang="en-US" altLang="ja-JP" sz="2000">
+              <a:rPr kumimoji="1" lang="ja-JP" altLang="en-US" sz="2000">
                 <a:solidFill>
                   <a:srgbClr val="333333"/>
                 </a:solidFill>
                 <a:latin typeface="Arial" panose="020B0604020202020204" pitchFamily="34" charset="0"/>
               </a:rPr>
-              <a:t>Architecture, implementation and commit history in 75 seconds</a:t>
-            </a:r>
-            <a:endParaRPr kumimoji="1" lang="ja-JP" altLang="en-US" sz="2000">
-              <a:solidFill>
-                <a:srgbClr val="333333"/>
-              </a:solidFill>
-              <a:latin typeface="Arial" panose="020B0604020202020204" pitchFamily="34" charset="0"/>
-            </a:endParaRPr>
+              <a:t>設計・実装・コミットから学ぶ短時間プレビュー</a:t>
+            </a:r>
           </a:p>
         </p:txBody>
       </p:sp>
@@ -3757,7 +3754,7 @@
           <p:cNvPr id="5" name="テキスト ボックス 4">
             <a:extLst>
               <a:ext uri="{FF2B5EF4-FFF2-40B4-BE49-F238E27FC236}">
-                <a16:creationId xmlns:a16="http://schemas.microsoft.com/office/drawing/2014/main" id="{A7B29E95-FDBA-7AC1-2D6E-4E683FDD11AC}"/>
+                <a16:creationId xmlns:a16="http://schemas.microsoft.com/office/drawing/2014/main" id="{C8BF038A-B6D8-ED34-EC5C-3F68A0086D93}"/>
               </a:ext>
             </a:extLst>
           </p:cNvPr>
@@ -3804,7 +3801,7 @@
             <a:hlinkClick r:id="" action="ppaction://media"/>
             <a:extLst>
               <a:ext uri="{FF2B5EF4-FFF2-40B4-BE49-F238E27FC236}">
-                <a16:creationId xmlns:a16="http://schemas.microsoft.com/office/drawing/2014/main" id="{7812EB01-F2A5-8D50-09CE-CF966DC17A73}"/>
+                <a16:creationId xmlns:a16="http://schemas.microsoft.com/office/drawing/2014/main" id="{E4F18A63-B1AF-FF31-6BB6-BFF62A49AF9C}"/>
               </a:ext>
             </a:extLst>
           </p:cNvPr>
@@ -3839,7 +3836,7 @@
     </p:spTree>
     <p:extLst>
       <p:ext uri="{BB962C8B-B14F-4D97-AF65-F5344CB8AC3E}">
-        <p14:creationId xmlns:p14="http://schemas.microsoft.com/office/powerpoint/2010/main" val="2981565037"/>
+        <p14:creationId xmlns:p14="http://schemas.microsoft.com/office/powerpoint/2010/main" val="3522501168"/>
       </p:ext>
     </p:extLst>
   </p:cSld>
@@ -3963,7 +3960,7 @@
           <p:cNvPr id="2" name="テキスト ボックス 1">
             <a:extLst>
               <a:ext uri="{FF2B5EF4-FFF2-40B4-BE49-F238E27FC236}">
-                <a16:creationId xmlns:a16="http://schemas.microsoft.com/office/drawing/2014/main" id="{9750F5D0-0018-254B-A64B-BD93DCE20FE2}"/>
+                <a16:creationId xmlns:a16="http://schemas.microsoft.com/office/drawing/2014/main" id="{7D7BD5DE-D798-2EC0-8466-BC5F02BFBF4A}"/>
               </a:ext>
             </a:extLst>
           </p:cNvPr>
@@ -4009,7 +4006,7 @@
           <p:cNvPr id="3" name="テキスト ボックス 2">
             <a:extLst>
               <a:ext uri="{FF2B5EF4-FFF2-40B4-BE49-F238E27FC236}">
-                <a16:creationId xmlns:a16="http://schemas.microsoft.com/office/drawing/2014/main" id="{3296FB36-C274-4B43-6825-3F2D9E201F05}"/>
+                <a16:creationId xmlns:a16="http://schemas.microsoft.com/office/drawing/2014/main" id="{85B574EE-CB47-1E00-D517-46F2A4DEE075}"/>
               </a:ext>
             </a:extLst>
           </p:cNvPr>
@@ -4033,20 +4030,14 @@
           <a:lstStyle/>
           <a:p>
             <a:r>
-              <a:rPr kumimoji="1" lang="en-US" altLang="ja-JP" sz="3400" b="1">
+              <a:rPr kumimoji="1" lang="ja-JP" altLang="en-US" sz="3400" b="1">
                 <a:solidFill>
                   <a:srgbClr val="111111"/>
                 </a:solidFill>
                 <a:latin typeface="Arial" panose="020B0604020202020204" pitchFamily="34" charset="0"/>
               </a:rPr>
-              <a:t>WHAT DOES IT SOLVE?</a:t>
-            </a:r>
-            <a:endParaRPr kumimoji="1" lang="ja-JP" altLang="en-US" sz="3400" b="1">
-              <a:solidFill>
-                <a:srgbClr val="111111"/>
-              </a:solidFill>
-              <a:latin typeface="Arial" panose="020B0604020202020204" pitchFamily="34" charset="0"/>
-            </a:endParaRPr>
+              <a:t>このプロジェクトは何を解決する？</a:t>
+            </a:r>
           </a:p>
         </p:txBody>
       </p:sp>
@@ -4055,7 +4046,7 @@
           <p:cNvPr id="4" name="テキスト ボックス 3">
             <a:extLst>
               <a:ext uri="{FF2B5EF4-FFF2-40B4-BE49-F238E27FC236}">
-                <a16:creationId xmlns:a16="http://schemas.microsoft.com/office/drawing/2014/main" id="{F68932C9-C1CD-A648-F4EC-F7F4B60901AE}"/>
+                <a16:creationId xmlns:a16="http://schemas.microsoft.com/office/drawing/2014/main" id="{E2E31B70-52BE-CD3C-7762-3E518B5D1840}"/>
               </a:ext>
             </a:extLst>
           </p:cNvPr>
@@ -4122,7 +4113,7 @@
           <p:cNvPr id="5" name="テキスト ボックス 4">
             <a:extLst>
               <a:ext uri="{FF2B5EF4-FFF2-40B4-BE49-F238E27FC236}">
-                <a16:creationId xmlns:a16="http://schemas.microsoft.com/office/drawing/2014/main" id="{A58A71A0-EEC0-CD85-FFEF-4643B0832D90}"/>
+                <a16:creationId xmlns:a16="http://schemas.microsoft.com/office/drawing/2014/main" id="{95FFC792-BA86-B548-C6E1-B239EA3DEBF8}"/>
               </a:ext>
             </a:extLst>
           </p:cNvPr>
@@ -4169,7 +4160,7 @@
             <a:hlinkClick r:id="" action="ppaction://media"/>
             <a:extLst>
               <a:ext uri="{FF2B5EF4-FFF2-40B4-BE49-F238E27FC236}">
-                <a16:creationId xmlns:a16="http://schemas.microsoft.com/office/drawing/2014/main" id="{67C57098-0E9E-A7FF-7C1A-6CC9C0E705A0}"/>
+                <a16:creationId xmlns:a16="http://schemas.microsoft.com/office/drawing/2014/main" id="{A7049F4F-F4D0-E969-2BC3-67CEFCC38E8A}"/>
               </a:ext>
             </a:extLst>
           </p:cNvPr>
@@ -4204,7 +4195,7 @@
     </p:spTree>
     <p:extLst>
       <p:ext uri="{BB962C8B-B14F-4D97-AF65-F5344CB8AC3E}">
-        <p14:creationId xmlns:p14="http://schemas.microsoft.com/office/powerpoint/2010/main" val="1453228006"/>
+        <p14:creationId xmlns:p14="http://schemas.microsoft.com/office/powerpoint/2010/main" val="2731243468"/>
       </p:ext>
     </p:extLst>
   </p:cSld>
@@ -4328,7 +4319,7 @@
           <p:cNvPr id="2" name="テキスト ボックス 1">
             <a:extLst>
               <a:ext uri="{FF2B5EF4-FFF2-40B4-BE49-F238E27FC236}">
-                <a16:creationId xmlns:a16="http://schemas.microsoft.com/office/drawing/2014/main" id="{94730479-AC3D-88CB-B560-5B06C022B4AD}"/>
+                <a16:creationId xmlns:a16="http://schemas.microsoft.com/office/drawing/2014/main" id="{1299E6DC-8D08-DE66-2F85-992BE77E0D49}"/>
               </a:ext>
             </a:extLst>
           </p:cNvPr>
@@ -4374,7 +4365,7 @@
           <p:cNvPr id="3" name="テキスト ボックス 2">
             <a:extLst>
               <a:ext uri="{FF2B5EF4-FFF2-40B4-BE49-F238E27FC236}">
-                <a16:creationId xmlns:a16="http://schemas.microsoft.com/office/drawing/2014/main" id="{30B4407B-FC7B-6C5C-D05B-1A2743411A45}"/>
+                <a16:creationId xmlns:a16="http://schemas.microsoft.com/office/drawing/2014/main" id="{83616F24-4373-76AA-634E-2558C4F629DA}"/>
               </a:ext>
             </a:extLst>
           </p:cNvPr>
@@ -4398,20 +4389,14 @@
           <a:lstStyle/>
           <a:p>
             <a:r>
-              <a:rPr kumimoji="1" lang="en-US" altLang="ja-JP" sz="3400" b="1">
+              <a:rPr kumimoji="1" lang="ja-JP" altLang="en-US" sz="3400" b="1">
                 <a:solidFill>
                   <a:srgbClr val="111111"/>
                 </a:solidFill>
                 <a:latin typeface="Arial" panose="020B0604020202020204" pitchFamily="34" charset="0"/>
               </a:rPr>
-              <a:t>TECH STACK</a:t>
-            </a:r>
-            <a:endParaRPr kumimoji="1" lang="ja-JP" altLang="en-US" sz="3400" b="1">
-              <a:solidFill>
-                <a:srgbClr val="111111"/>
-              </a:solidFill>
-              <a:latin typeface="Arial" panose="020B0604020202020204" pitchFamily="34" charset="0"/>
-            </a:endParaRPr>
+              <a:t>技術スタック</a:t>
+            </a:r>
           </a:p>
         </p:txBody>
       </p:sp>
@@ -4420,7 +4405,7 @@
           <p:cNvPr id="4" name="テキスト ボックス 3">
             <a:extLst>
               <a:ext uri="{FF2B5EF4-FFF2-40B4-BE49-F238E27FC236}">
-                <a16:creationId xmlns:a16="http://schemas.microsoft.com/office/drawing/2014/main" id="{560F7193-7540-A087-3940-D8FF8675CF53}"/>
+                <a16:creationId xmlns:a16="http://schemas.microsoft.com/office/drawing/2014/main" id="{A4938105-9CA1-BD77-877C-E4B14895502B}"/>
               </a:ext>
             </a:extLst>
           </p:cNvPr>
@@ -4430,7 +4415,7 @@
         <p:spPr>
           <a:xfrm>
             <a:off x="533400" y="3429000"/>
-            <a:ext cx="10795000" cy="400110"/>
+            <a:ext cx="10795000" cy="707886"/>
           </a:xfrm>
           <a:prstGeom prst="rect">
             <a:avLst/>
@@ -4444,20 +4429,33 @@
           <a:lstStyle/>
           <a:p>
             <a:r>
+              <a:rPr kumimoji="1" lang="ja-JP" altLang="en-US" sz="2000">
+                <a:solidFill>
+                  <a:srgbClr val="333333"/>
+                </a:solidFill>
+                <a:latin typeface="Arial" panose="020B0604020202020204" pitchFamily="34" charset="0"/>
+              </a:rPr>
+              <a:t>主要技術：</a:t>
+            </a:r>
+            <a:r>
               <a:rPr kumimoji="1" lang="en-US" altLang="ja-JP" sz="2000">
                 <a:solidFill>
                   <a:srgbClr val="333333"/>
                 </a:solidFill>
                 <a:latin typeface="Arial" panose="020B0604020202020204" pitchFamily="34" charset="0"/>
               </a:rPr>
-              <a:t>Primary technologies: TypeScript</a:t>
-            </a:r>
-            <a:endParaRPr kumimoji="1" lang="ja-JP" altLang="en-US" sz="2000">
-              <a:solidFill>
-                <a:srgbClr val="333333"/>
-              </a:solidFill>
-              <a:latin typeface="Arial" panose="020B0604020202020204" pitchFamily="34" charset="0"/>
-            </a:endParaRPr>
+              <a:t>TypeScript
+</a:t>
+            </a:r>
+            <a:r>
+              <a:rPr kumimoji="1" lang="ja-JP" altLang="en-US" sz="2000">
+                <a:solidFill>
+                  <a:srgbClr val="333333"/>
+                </a:solidFill>
+                <a:latin typeface="Arial" panose="020B0604020202020204" pitchFamily="34" charset="0"/>
+              </a:rPr>
+              <a:t>役割を分け、保守しやすい構成を目指しています。</a:t>
+            </a:r>
           </a:p>
         </p:txBody>
       </p:sp>
@@ -4466,7 +4464,7 @@
           <p:cNvPr id="5" name="テキスト ボックス 4">
             <a:extLst>
               <a:ext uri="{FF2B5EF4-FFF2-40B4-BE49-F238E27FC236}">
-                <a16:creationId xmlns:a16="http://schemas.microsoft.com/office/drawing/2014/main" id="{1E1D6F0F-7E0E-8CF7-ABEE-3DC598321628}"/>
+                <a16:creationId xmlns:a16="http://schemas.microsoft.com/office/drawing/2014/main" id="{CD5FB18E-01DA-CE82-9E74-CD3D7DB7C552}"/>
               </a:ext>
             </a:extLst>
           </p:cNvPr>
@@ -4513,7 +4511,7 @@
             <a:hlinkClick r:id="" action="ppaction://media"/>
             <a:extLst>
               <a:ext uri="{FF2B5EF4-FFF2-40B4-BE49-F238E27FC236}">
-                <a16:creationId xmlns:a16="http://schemas.microsoft.com/office/drawing/2014/main" id="{27FE1F33-EAA5-DFB9-B8A3-5C1089EDDF06}"/>
+                <a16:creationId xmlns:a16="http://schemas.microsoft.com/office/drawing/2014/main" id="{D3E0F494-0597-6847-EF8E-0FA39CA79752}"/>
               </a:ext>
             </a:extLst>
           </p:cNvPr>
@@ -4548,7 +4546,7 @@
     </p:spTree>
     <p:extLst>
       <p:ext uri="{BB962C8B-B14F-4D97-AF65-F5344CB8AC3E}">
-        <p14:creationId xmlns:p14="http://schemas.microsoft.com/office/powerpoint/2010/main" val="819602989"/>
+        <p14:creationId xmlns:p14="http://schemas.microsoft.com/office/powerpoint/2010/main" val="717094519"/>
       </p:ext>
     </p:extLst>
   </p:cSld>
@@ -4672,7 +4670,7 @@
           <p:cNvPr id="2" name="テキスト ボックス 1">
             <a:extLst>
               <a:ext uri="{FF2B5EF4-FFF2-40B4-BE49-F238E27FC236}">
-                <a16:creationId xmlns:a16="http://schemas.microsoft.com/office/drawing/2014/main" id="{95564484-157B-6199-9493-820A228003C8}"/>
+                <a16:creationId xmlns:a16="http://schemas.microsoft.com/office/drawing/2014/main" id="{7E749CF6-D4CC-3525-0E09-BBCF8FB4F335}"/>
               </a:ext>
             </a:extLst>
           </p:cNvPr>
@@ -4718,7 +4716,7 @@
           <p:cNvPr id="3" name="テキスト ボックス 2">
             <a:extLst>
               <a:ext uri="{FF2B5EF4-FFF2-40B4-BE49-F238E27FC236}">
-                <a16:creationId xmlns:a16="http://schemas.microsoft.com/office/drawing/2014/main" id="{3A6B8FBF-AC92-DBD7-92AB-478BAB10D508}"/>
+                <a16:creationId xmlns:a16="http://schemas.microsoft.com/office/drawing/2014/main" id="{35BF2121-8C06-4043-12A0-4F666EF459A8}"/>
               </a:ext>
             </a:extLst>
           </p:cNvPr>
@@ -4742,20 +4740,14 @@
           <a:lstStyle/>
           <a:p>
             <a:r>
-              <a:rPr kumimoji="1" lang="en-US" altLang="ja-JP" sz="3400" b="1">
+              <a:rPr kumimoji="1" lang="ja-JP" altLang="en-US" sz="3400" b="1">
                 <a:solidFill>
                   <a:srgbClr val="111111"/>
                 </a:solidFill>
                 <a:latin typeface="Arial" panose="020B0604020202020204" pitchFamily="34" charset="0"/>
               </a:rPr>
-              <a:t>REPOSITORY HIGHLIGHTS</a:t>
-            </a:r>
-            <a:endParaRPr kumimoji="1" lang="ja-JP" altLang="en-US" sz="3400" b="1">
-              <a:solidFill>
-                <a:srgbClr val="111111"/>
-              </a:solidFill>
-              <a:latin typeface="Arial" panose="020B0604020202020204" pitchFamily="34" charset="0"/>
-            </a:endParaRPr>
+              <a:t>リポジトリの読みどころ</a:t>
+            </a:r>
           </a:p>
         </p:txBody>
       </p:sp>
@@ -4764,7 +4756,7 @@
           <p:cNvPr id="4" name="テキスト ボックス 3">
             <a:extLst>
               <a:ext uri="{FF2B5EF4-FFF2-40B4-BE49-F238E27FC236}">
-                <a16:creationId xmlns:a16="http://schemas.microsoft.com/office/drawing/2014/main" id="{656E6CA5-4AC5-1A35-AB5F-12B852D5350F}"/>
+                <a16:creationId xmlns:a16="http://schemas.microsoft.com/office/drawing/2014/main" id="{FD1EDC23-245E-A9D6-7455-8743CEB507CD}"/>
               </a:ext>
             </a:extLst>
           </p:cNvPr>
@@ -4774,7 +4766,7 @@
         <p:spPr>
           <a:xfrm>
             <a:off x="533400" y="3429000"/>
-            <a:ext cx="10795000" cy="400110"/>
+            <a:ext cx="10795000" cy="707886"/>
           </a:xfrm>
           <a:prstGeom prst="rect">
             <a:avLst/>
@@ -4788,13 +4780,77 @@
           <a:lstStyle/>
           <a:p>
             <a:r>
+              <a:rPr kumimoji="1" lang="ja-JP" altLang="en-US" sz="2000">
+                <a:solidFill>
+                  <a:srgbClr val="333333"/>
+                </a:solidFill>
+                <a:latin typeface="Arial" panose="020B0604020202020204" pitchFamily="34" charset="0"/>
+              </a:rPr>
+              <a:t>公開コード、</a:t>
+            </a:r>
+            <a:r>
               <a:rPr kumimoji="1" lang="en-US" altLang="ja-JP" sz="2000">
                 <a:solidFill>
                   <a:srgbClr val="333333"/>
                 </a:solidFill>
                 <a:latin typeface="Arial" panose="020B0604020202020204" pitchFamily="34" charset="0"/>
               </a:rPr>
-              <a:t>Public source code, README and commit history reveal the design decisions.</a:t>
+              <a:t>README</a:t>
+            </a:r>
+            <a:r>
+              <a:rPr kumimoji="1" lang="ja-JP" altLang="en-US" sz="2000">
+                <a:solidFill>
+                  <a:srgbClr val="333333"/>
+                </a:solidFill>
+                <a:latin typeface="Arial" panose="020B0604020202020204" pitchFamily="34" charset="0"/>
+              </a:rPr>
+              <a:t>、コミット履歴から設計判断を確認できます。
+主なファイル：</a:t>
+            </a:r>
+            <a:r>
+              <a:rPr kumimoji="1" lang="en-US" altLang="ja-JP" sz="2000">
+                <a:solidFill>
+                  <a:srgbClr val="333333"/>
+                </a:solidFill>
+                <a:latin typeface="Arial" panose="020B0604020202020204" pitchFamily="34" charset="0"/>
+              </a:rPr>
+              <a:t>README.md</a:t>
+            </a:r>
+            <a:r>
+              <a:rPr kumimoji="1" lang="ja-JP" altLang="en-US" sz="2000">
+                <a:solidFill>
+                  <a:srgbClr val="333333"/>
+                </a:solidFill>
+                <a:latin typeface="Arial" panose="020B0604020202020204" pitchFamily="34" charset="0"/>
+              </a:rPr>
+              <a:t>、</a:t>
+            </a:r>
+            <a:r>
+              <a:rPr kumimoji="1" lang="en-US" altLang="ja-JP" sz="2000">
+                <a:solidFill>
+                  <a:srgbClr val="333333"/>
+                </a:solidFill>
+                <a:latin typeface="Arial" panose="020B0604020202020204" pitchFamily="34" charset="0"/>
+              </a:rPr>
+              <a:t>app.json</a:t>
+            </a:r>
+            <a:r>
+              <a:rPr kumimoji="1" lang="ja-JP" altLang="en-US" sz="2000">
+                <a:solidFill>
+                  <a:srgbClr val="333333"/>
+                </a:solidFill>
+                <a:latin typeface="Arial" panose="020B0604020202020204" pitchFamily="34" charset="0"/>
+              </a:rPr>
+              <a:t>、</a:t>
+            </a:r>
+            <a:r>
+              <a:rPr kumimoji="1" lang="en-US" altLang="ja-JP" sz="2000">
+                <a:solidFill>
+                  <a:srgbClr val="333333"/>
+                </a:solidFill>
+                <a:latin typeface="Arial" panose="020B0604020202020204" pitchFamily="34" charset="0"/>
+              </a:rPr>
+              <a:t>app</a:t>
             </a:r>
             <a:endParaRPr kumimoji="1" lang="ja-JP" altLang="en-US" sz="2000">
               <a:solidFill>
@@ -4810,7 +4866,7 @@
           <p:cNvPr id="5" name="テキスト ボックス 4">
             <a:extLst>
               <a:ext uri="{FF2B5EF4-FFF2-40B4-BE49-F238E27FC236}">
-                <a16:creationId xmlns:a16="http://schemas.microsoft.com/office/drawing/2014/main" id="{F9C1968A-8E47-9AE3-6EA6-A30AF02F7846}"/>
+                <a16:creationId xmlns:a16="http://schemas.microsoft.com/office/drawing/2014/main" id="{8F663562-08FE-9C9B-8CD5-9CD530CC4593}"/>
               </a:ext>
             </a:extLst>
           </p:cNvPr>
@@ -4857,7 +4913,7 @@
             <a:hlinkClick r:id="" action="ppaction://media"/>
             <a:extLst>
               <a:ext uri="{FF2B5EF4-FFF2-40B4-BE49-F238E27FC236}">
-                <a16:creationId xmlns:a16="http://schemas.microsoft.com/office/drawing/2014/main" id="{50B9F2FA-E7DB-8BB3-DA59-CE1AAD1F38FD}"/>
+                <a16:creationId xmlns:a16="http://schemas.microsoft.com/office/drawing/2014/main" id="{924CD828-7178-7E08-C0C8-4CD1430DC669}"/>
               </a:ext>
             </a:extLst>
           </p:cNvPr>
@@ -4892,7 +4948,7 @@
     </p:spTree>
     <p:extLst>
       <p:ext uri="{BB962C8B-B14F-4D97-AF65-F5344CB8AC3E}">
-        <p14:creationId xmlns:p14="http://schemas.microsoft.com/office/powerpoint/2010/main" val="834982690"/>
+        <p14:creationId xmlns:p14="http://schemas.microsoft.com/office/powerpoint/2010/main" val="4058352819"/>
       </p:ext>
     </p:extLst>
   </p:cSld>
@@ -5016,7 +5072,7 @@
           <p:cNvPr id="2" name="テキスト ボックス 1">
             <a:extLst>
               <a:ext uri="{FF2B5EF4-FFF2-40B4-BE49-F238E27FC236}">
-                <a16:creationId xmlns:a16="http://schemas.microsoft.com/office/drawing/2014/main" id="{E5D7AA87-A37F-11FB-5391-108380247618}"/>
+                <a16:creationId xmlns:a16="http://schemas.microsoft.com/office/drawing/2014/main" id="{B456AD30-11EE-0B63-58BB-D02458E7508B}"/>
               </a:ext>
             </a:extLst>
           </p:cNvPr>
@@ -5062,7 +5118,7 @@
           <p:cNvPr id="3" name="テキスト ボックス 2">
             <a:extLst>
               <a:ext uri="{FF2B5EF4-FFF2-40B4-BE49-F238E27FC236}">
-                <a16:creationId xmlns:a16="http://schemas.microsoft.com/office/drawing/2014/main" id="{83540795-1E8A-4E35-D052-669AA7D2586E}"/>
+                <a16:creationId xmlns:a16="http://schemas.microsoft.com/office/drawing/2014/main" id="{FA256770-E74A-8F39-D981-9FB7B75607BF}"/>
               </a:ext>
             </a:extLst>
           </p:cNvPr>
@@ -5086,20 +5142,14 @@
           <a:lstStyle/>
           <a:p>
             <a:r>
-              <a:rPr kumimoji="1" lang="en-US" altLang="ja-JP" sz="3400" b="1">
+              <a:rPr kumimoji="1" lang="ja-JP" altLang="en-US" sz="3400" b="1">
                 <a:solidFill>
                   <a:srgbClr val="111111"/>
                 </a:solidFill>
                 <a:latin typeface="Arial" panose="020B0604020202020204" pitchFamily="34" charset="0"/>
               </a:rPr>
-              <a:t>ITERATIVE IMPROVEMENT</a:t>
-            </a:r>
-            <a:endParaRPr kumimoji="1" lang="ja-JP" altLang="en-US" sz="3400" b="1">
-              <a:solidFill>
-                <a:srgbClr val="111111"/>
-              </a:solidFill>
-              <a:latin typeface="Arial" panose="020B0604020202020204" pitchFamily="34" charset="0"/>
-            </a:endParaRPr>
+              <a:t>コミットから分かる改善</a:t>
+            </a:r>
           </a:p>
         </p:txBody>
       </p:sp>
@@ -5108,7 +5158,7 @@
           <p:cNvPr id="4" name="テキスト ボックス 3">
             <a:extLst>
               <a:ext uri="{FF2B5EF4-FFF2-40B4-BE49-F238E27FC236}">
-                <a16:creationId xmlns:a16="http://schemas.microsoft.com/office/drawing/2014/main" id="{31FD9CB4-8770-EC01-C722-015B9A30D963}"/>
+                <a16:creationId xmlns:a16="http://schemas.microsoft.com/office/drawing/2014/main" id="{65BC42AE-72CB-449C-E65E-9639C526A273}"/>
               </a:ext>
             </a:extLst>
           </p:cNvPr>
@@ -5138,7 +5188,7 @@
                 </a:solidFill>
                 <a:latin typeface="Arial" panose="020B0604020202020204" pitchFamily="34" charset="0"/>
               </a:rPr>
-              <a:t>Small commits continuously improve features, quality and release readiness.</a:t>
+              <a:t>Build GAME PORTAL JP mobile app prototype</a:t>
             </a:r>
             <a:endParaRPr kumimoji="1" lang="ja-JP" altLang="en-US" sz="2000">
               <a:solidFill>
@@ -5154,7 +5204,7 @@
           <p:cNvPr id="5" name="テキスト ボックス 4">
             <a:extLst>
               <a:ext uri="{FF2B5EF4-FFF2-40B4-BE49-F238E27FC236}">
-                <a16:creationId xmlns:a16="http://schemas.microsoft.com/office/drawing/2014/main" id="{C6C43517-C8DD-A540-9D07-463A34A51764}"/>
+                <a16:creationId xmlns:a16="http://schemas.microsoft.com/office/drawing/2014/main" id="{5DBF5111-9D40-A8D6-4396-9813A02D8487}"/>
               </a:ext>
             </a:extLst>
           </p:cNvPr>
@@ -5201,7 +5251,7 @@
             <a:hlinkClick r:id="" action="ppaction://media"/>
             <a:extLst>
               <a:ext uri="{FF2B5EF4-FFF2-40B4-BE49-F238E27FC236}">
-                <a16:creationId xmlns:a16="http://schemas.microsoft.com/office/drawing/2014/main" id="{780B735D-51BA-3190-7569-71CF29F441C3}"/>
+                <a16:creationId xmlns:a16="http://schemas.microsoft.com/office/drawing/2014/main" id="{D372343A-A821-A71D-2C4D-D48F64CCEBB8}"/>
               </a:ext>
             </a:extLst>
           </p:cNvPr>
@@ -5236,7 +5286,7 @@
     </p:spTree>
     <p:extLst>
       <p:ext uri="{BB962C8B-B14F-4D97-AF65-F5344CB8AC3E}">
-        <p14:creationId xmlns:p14="http://schemas.microsoft.com/office/powerpoint/2010/main" val="2271440499"/>
+        <p14:creationId xmlns:p14="http://schemas.microsoft.com/office/powerpoint/2010/main" val="3953336822"/>
       </p:ext>
     </p:extLst>
   </p:cSld>
@@ -5360,7 +5410,7 @@
           <p:cNvPr id="2" name="テキスト ボックス 1">
             <a:extLst>
               <a:ext uri="{FF2B5EF4-FFF2-40B4-BE49-F238E27FC236}">
-                <a16:creationId xmlns:a16="http://schemas.microsoft.com/office/drawing/2014/main" id="{6EE4C698-3C53-E31D-4D42-6D2BB963B230}"/>
+                <a16:creationId xmlns:a16="http://schemas.microsoft.com/office/drawing/2014/main" id="{24AF36ED-2536-88E3-C855-796884E6C101}"/>
               </a:ext>
             </a:extLst>
           </p:cNvPr>
@@ -5406,7 +5456,7 @@
           <p:cNvPr id="3" name="テキスト ボックス 2">
             <a:extLst>
               <a:ext uri="{FF2B5EF4-FFF2-40B4-BE49-F238E27FC236}">
-                <a16:creationId xmlns:a16="http://schemas.microsoft.com/office/drawing/2014/main" id="{FA928751-D481-478D-A4DD-998C79DFB154}"/>
+                <a16:creationId xmlns:a16="http://schemas.microsoft.com/office/drawing/2014/main" id="{F2D342E0-35CC-A568-9E64-3E8EEFB7E04E}"/>
               </a:ext>
             </a:extLst>
           </p:cNvPr>
@@ -5430,20 +5480,14 @@
           <a:lstStyle/>
           <a:p>
             <a:r>
-              <a:rPr kumimoji="1" lang="en-US" altLang="ja-JP" sz="3400" b="1">
+              <a:rPr kumimoji="1" lang="ja-JP" altLang="en-US" sz="3400" b="1">
                 <a:solidFill>
                   <a:srgbClr val="111111"/>
                 </a:solidFill>
                 <a:latin typeface="Arial" panose="020B0604020202020204" pitchFamily="34" charset="0"/>
               </a:rPr>
-              <a:t>READ THE FULL ARTICLE</a:t>
-            </a:r>
-            <a:endParaRPr kumimoji="1" lang="ja-JP" altLang="en-US" sz="3400" b="1">
-              <a:solidFill>
-                <a:srgbClr val="111111"/>
-              </a:solidFill>
-              <a:latin typeface="Arial" panose="020B0604020202020204" pitchFamily="34" charset="0"/>
-            </a:endParaRPr>
+              <a:t>詳しくは積み上げログへ</a:t>
+            </a:r>
           </a:p>
         </p:txBody>
       </p:sp>
@@ -5452,7 +5496,7 @@
           <p:cNvPr id="4" name="テキスト ボックス 3">
             <a:extLst>
               <a:ext uri="{FF2B5EF4-FFF2-40B4-BE49-F238E27FC236}">
-                <a16:creationId xmlns:a16="http://schemas.microsoft.com/office/drawing/2014/main" id="{6C550A2A-D4A3-DCD8-BD52-554D54B8B344}"/>
+                <a16:creationId xmlns:a16="http://schemas.microsoft.com/office/drawing/2014/main" id="{823303E5-AC82-05E9-7C2D-27020D0223E6}"/>
               </a:ext>
             </a:extLst>
           </p:cNvPr>
@@ -5476,14 +5520,32 @@
           <a:lstStyle/>
           <a:p>
             <a:r>
-              <a:rPr kumimoji="1" lang="sv-SE" altLang="ja-JP" sz="2000">
+              <a:rPr kumimoji="1" lang="zh-TW" altLang="en-US" sz="2000">
+                <a:solidFill>
+                  <a:srgbClr val="333333"/>
+                </a:solidFill>
+                <a:latin typeface="Arial" panose="020B0604020202020204" pitchFamily="34" charset="0"/>
+              </a:rPr>
+              <a:t>記事： </a:t>
+            </a:r>
+            <a:r>
+              <a:rPr kumimoji="1" lang="en-US" altLang="zh-TW" sz="2000">
                 <a:solidFill>
                   <a:srgbClr val="333333"/>
                 </a:solidFill>
                 <a:latin typeface="Arial" panose="020B0604020202020204" pitchFamily="34" charset="0"/>
               </a:rPr>
               <a:t>https://syunnjack.dev/articles/retro-new-games-app
-TSUMIAGE LOG</a:t>
+</a:t>
+            </a:r>
+            <a:r>
+              <a:rPr kumimoji="1" lang="zh-TW" altLang="en-US" sz="2000">
+                <a:solidFill>
+                  <a:srgbClr val="333333"/>
+                </a:solidFill>
+                <a:latin typeface="Arial" panose="020B0604020202020204" pitchFamily="34" charset="0"/>
+              </a:rPr>
+              <a:t>学び、作り、振り返る開発記録。</a:t>
             </a:r>
             <a:endParaRPr kumimoji="1" lang="ja-JP" altLang="en-US" sz="2000">
               <a:solidFill>
@@ -5499,7 +5561,7 @@
           <p:cNvPr id="5" name="テキスト ボックス 4">
             <a:extLst>
               <a:ext uri="{FF2B5EF4-FFF2-40B4-BE49-F238E27FC236}">
-                <a16:creationId xmlns:a16="http://schemas.microsoft.com/office/drawing/2014/main" id="{4906DB67-A1C6-2146-EBC5-7C4428F6606A}"/>
+                <a16:creationId xmlns:a16="http://schemas.microsoft.com/office/drawing/2014/main" id="{574D68FE-D1BB-6024-23DE-89FB5B6480B7}"/>
               </a:ext>
             </a:extLst>
           </p:cNvPr>
@@ -5546,7 +5608,7 @@
             <a:hlinkClick r:id="" action="ppaction://media"/>
             <a:extLst>
               <a:ext uri="{FF2B5EF4-FFF2-40B4-BE49-F238E27FC236}">
-                <a16:creationId xmlns:a16="http://schemas.microsoft.com/office/drawing/2014/main" id="{269839E5-4208-73B1-A83B-A6E58598D7DA}"/>
+                <a16:creationId xmlns:a16="http://schemas.microsoft.com/office/drawing/2014/main" id="{0EE02384-F334-BC07-BD4D-4A30A5BDAB83}"/>
               </a:ext>
             </a:extLst>
           </p:cNvPr>
@@ -5581,7 +5643,7 @@
     </p:spTree>
     <p:extLst>
       <p:ext uri="{BB962C8B-B14F-4D97-AF65-F5344CB8AC3E}">
-        <p14:creationId xmlns:p14="http://schemas.microsoft.com/office/powerpoint/2010/main" val="3140071991"/>
+        <p14:creationId xmlns:p14="http://schemas.microsoft.com/office/powerpoint/2010/main" val="2286560722"/>
       </p:ext>
     </p:extLst>
   </p:cSld>

--- a/public/videos/repositories/retro-new-games-app/retro-new-games-app-tech-preview.pptx
+++ b/public/videos/repositories/retro-new-games-app/retro-new-games-app-tech-preview.pptx
@@ -134,7 +134,7 @@
           <p:cNvPr id="2" name="タイトル 1">
             <a:extLst>
               <a:ext uri="{FF2B5EF4-FFF2-40B4-BE49-F238E27FC236}">
-                <a16:creationId xmlns:a16="http://schemas.microsoft.com/office/drawing/2014/main" id="{D44479E5-3A41-2885-067A-5F34C3D40E05}"/>
+                <a16:creationId xmlns:a16="http://schemas.microsoft.com/office/drawing/2014/main" id="{6B927C90-A628-8B98-D97C-4CD7554F7050}"/>
               </a:ext>
             </a:extLst>
           </p:cNvPr>
@@ -171,7 +171,7 @@
           <p:cNvPr id="3" name="字幕 2">
             <a:extLst>
               <a:ext uri="{FF2B5EF4-FFF2-40B4-BE49-F238E27FC236}">
-                <a16:creationId xmlns:a16="http://schemas.microsoft.com/office/drawing/2014/main" id="{1D132459-8B8F-90AB-0691-A6F47452B07B}"/>
+                <a16:creationId xmlns:a16="http://schemas.microsoft.com/office/drawing/2014/main" id="{51FA2648-ABBD-466D-B53F-E32050E60D12}"/>
               </a:ext>
             </a:extLst>
           </p:cNvPr>
@@ -241,7 +241,7 @@
           <p:cNvPr id="4" name="日付プレースホルダー 3">
             <a:extLst>
               <a:ext uri="{FF2B5EF4-FFF2-40B4-BE49-F238E27FC236}">
-                <a16:creationId xmlns:a16="http://schemas.microsoft.com/office/drawing/2014/main" id="{7EC54298-BD58-AD79-A27D-7644B0573B23}"/>
+                <a16:creationId xmlns:a16="http://schemas.microsoft.com/office/drawing/2014/main" id="{691A132E-E206-A894-9A56-35E022FB40FB}"/>
               </a:ext>
             </a:extLst>
           </p:cNvPr>
@@ -257,7 +257,7 @@
           <a:bodyPr/>
           <a:lstStyle/>
           <a:p>
-            <a:fld id="{0D330DDB-BE35-4E13-B23E-AA6D7DFAD045}" type="datetimeFigureOut">
+            <a:fld id="{010E6AA8-D6BB-41F2-AE78-BE6A7A3D2D3B}" type="datetimeFigureOut">
               <a:rPr kumimoji="1" lang="ja-JP" altLang="en-US" smtClean="0"/>
               <a:t>2026/7/30</a:t>
             </a:fld>
@@ -270,7 +270,7 @@
           <p:cNvPr id="5" name="フッター プレースホルダー 4">
             <a:extLst>
               <a:ext uri="{FF2B5EF4-FFF2-40B4-BE49-F238E27FC236}">
-                <a16:creationId xmlns:a16="http://schemas.microsoft.com/office/drawing/2014/main" id="{C249ACAF-BE36-9B6D-EAC8-88F7A4459304}"/>
+                <a16:creationId xmlns:a16="http://schemas.microsoft.com/office/drawing/2014/main" id="{D4A7FE36-A6F3-900F-FE62-87B4F117FB2F}"/>
               </a:ext>
             </a:extLst>
           </p:cNvPr>
@@ -295,7 +295,7 @@
           <p:cNvPr id="6" name="スライド番号プレースホルダー 5">
             <a:extLst>
               <a:ext uri="{FF2B5EF4-FFF2-40B4-BE49-F238E27FC236}">
-                <a16:creationId xmlns:a16="http://schemas.microsoft.com/office/drawing/2014/main" id="{738A7945-0101-1757-2555-F6BD09AD006E}"/>
+                <a16:creationId xmlns:a16="http://schemas.microsoft.com/office/drawing/2014/main" id="{1349AC20-8B3C-F714-7061-10C1550F9E29}"/>
               </a:ext>
             </a:extLst>
           </p:cNvPr>
@@ -311,7 +311,7 @@
           <a:bodyPr/>
           <a:lstStyle/>
           <a:p>
-            <a:fld id="{EA0B4B91-38E6-45A8-9CBA-F15391A01C9B}" type="slidenum">
+            <a:fld id="{F046617C-A62C-4724-ACC1-8C39C42291C8}" type="slidenum">
               <a:rPr kumimoji="1" lang="ja-JP" altLang="en-US" smtClean="0"/>
               <a:t>‹#›</a:t>
             </a:fld>
@@ -322,7 +322,7 @@
     </p:spTree>
     <p:extLst>
       <p:ext uri="{BB962C8B-B14F-4D97-AF65-F5344CB8AC3E}">
-        <p14:creationId xmlns:p14="http://schemas.microsoft.com/office/powerpoint/2010/main" val="549609915"/>
+        <p14:creationId xmlns:p14="http://schemas.microsoft.com/office/powerpoint/2010/main" val="1378010733"/>
       </p:ext>
     </p:extLst>
   </p:cSld>
@@ -354,7 +354,7 @@
           <p:cNvPr id="2" name="タイトル 1">
             <a:extLst>
               <a:ext uri="{FF2B5EF4-FFF2-40B4-BE49-F238E27FC236}">
-                <a16:creationId xmlns:a16="http://schemas.microsoft.com/office/drawing/2014/main" id="{CA7EE158-6299-83A3-3D5C-50A951985441}"/>
+                <a16:creationId xmlns:a16="http://schemas.microsoft.com/office/drawing/2014/main" id="{2AD70AFA-B30B-9525-5CAF-93229FF675DD}"/>
               </a:ext>
             </a:extLst>
           </p:cNvPr>
@@ -382,7 +382,7 @@
           <p:cNvPr id="3" name="縦書きテキスト プレースホルダー 2">
             <a:extLst>
               <a:ext uri="{FF2B5EF4-FFF2-40B4-BE49-F238E27FC236}">
-                <a16:creationId xmlns:a16="http://schemas.microsoft.com/office/drawing/2014/main" id="{BFC0D6E8-6738-A715-2840-D2F3A7C41540}"/>
+                <a16:creationId xmlns:a16="http://schemas.microsoft.com/office/drawing/2014/main" id="{84E9F9A9-DFE2-1090-FFFF-465DB09857E2}"/>
               </a:ext>
             </a:extLst>
           </p:cNvPr>
@@ -471,7 +471,7 @@
           <p:cNvPr id="4" name="日付プレースホルダー 3">
             <a:extLst>
               <a:ext uri="{FF2B5EF4-FFF2-40B4-BE49-F238E27FC236}">
-                <a16:creationId xmlns:a16="http://schemas.microsoft.com/office/drawing/2014/main" id="{482D4216-6729-02F2-5375-A1216DA5890C}"/>
+                <a16:creationId xmlns:a16="http://schemas.microsoft.com/office/drawing/2014/main" id="{5D604452-4F65-A111-DAA4-93C1FE6712B4}"/>
               </a:ext>
             </a:extLst>
           </p:cNvPr>
@@ -487,7 +487,7 @@
           <a:bodyPr/>
           <a:lstStyle/>
           <a:p>
-            <a:fld id="{0D330DDB-BE35-4E13-B23E-AA6D7DFAD045}" type="datetimeFigureOut">
+            <a:fld id="{010E6AA8-D6BB-41F2-AE78-BE6A7A3D2D3B}" type="datetimeFigureOut">
               <a:rPr kumimoji="1" lang="ja-JP" altLang="en-US" smtClean="0"/>
               <a:t>2026/7/30</a:t>
             </a:fld>
@@ -500,7 +500,7 @@
           <p:cNvPr id="5" name="フッター プレースホルダー 4">
             <a:extLst>
               <a:ext uri="{FF2B5EF4-FFF2-40B4-BE49-F238E27FC236}">
-                <a16:creationId xmlns:a16="http://schemas.microsoft.com/office/drawing/2014/main" id="{4650A47C-ABA0-0D43-5CDE-836F4010463A}"/>
+                <a16:creationId xmlns:a16="http://schemas.microsoft.com/office/drawing/2014/main" id="{B3FA4820-8C2F-6707-C060-4CE302A6B8A2}"/>
               </a:ext>
             </a:extLst>
           </p:cNvPr>
@@ -525,7 +525,7 @@
           <p:cNvPr id="6" name="スライド番号プレースホルダー 5">
             <a:extLst>
               <a:ext uri="{FF2B5EF4-FFF2-40B4-BE49-F238E27FC236}">
-                <a16:creationId xmlns:a16="http://schemas.microsoft.com/office/drawing/2014/main" id="{9D622D99-7C13-79AB-2859-93AE6624ED8C}"/>
+                <a16:creationId xmlns:a16="http://schemas.microsoft.com/office/drawing/2014/main" id="{CF6D04E3-01DC-CA74-DB9F-1DE8A388252E}"/>
               </a:ext>
             </a:extLst>
           </p:cNvPr>
@@ -541,7 +541,7 @@
           <a:bodyPr/>
           <a:lstStyle/>
           <a:p>
-            <a:fld id="{EA0B4B91-38E6-45A8-9CBA-F15391A01C9B}" type="slidenum">
+            <a:fld id="{F046617C-A62C-4724-ACC1-8C39C42291C8}" type="slidenum">
               <a:rPr kumimoji="1" lang="ja-JP" altLang="en-US" smtClean="0"/>
               <a:t>‹#›</a:t>
             </a:fld>
@@ -552,7 +552,7 @@
     </p:spTree>
     <p:extLst>
       <p:ext uri="{BB962C8B-B14F-4D97-AF65-F5344CB8AC3E}">
-        <p14:creationId xmlns:p14="http://schemas.microsoft.com/office/powerpoint/2010/main" val="1089707001"/>
+        <p14:creationId xmlns:p14="http://schemas.microsoft.com/office/powerpoint/2010/main" val="4145620257"/>
       </p:ext>
     </p:extLst>
   </p:cSld>
@@ -584,7 +584,7 @@
           <p:cNvPr id="2" name="縦書きタイトル 1">
             <a:extLst>
               <a:ext uri="{FF2B5EF4-FFF2-40B4-BE49-F238E27FC236}">
-                <a16:creationId xmlns:a16="http://schemas.microsoft.com/office/drawing/2014/main" id="{8C770804-D9C5-A367-0DFF-C6D899CC2335}"/>
+                <a16:creationId xmlns:a16="http://schemas.microsoft.com/office/drawing/2014/main" id="{41749473-DB26-754B-D223-36E3FA89613F}"/>
               </a:ext>
             </a:extLst>
           </p:cNvPr>
@@ -617,7 +617,7 @@
           <p:cNvPr id="3" name="縦書きテキスト プレースホルダー 2">
             <a:extLst>
               <a:ext uri="{FF2B5EF4-FFF2-40B4-BE49-F238E27FC236}">
-                <a16:creationId xmlns:a16="http://schemas.microsoft.com/office/drawing/2014/main" id="{BCC512B7-07DD-226D-4BE3-01D5ED69364D}"/>
+                <a16:creationId xmlns:a16="http://schemas.microsoft.com/office/drawing/2014/main" id="{029E0C5B-9B6B-AEB1-7D97-B94872080A0D}"/>
               </a:ext>
             </a:extLst>
           </p:cNvPr>
@@ -711,7 +711,7 @@
           <p:cNvPr id="4" name="日付プレースホルダー 3">
             <a:extLst>
               <a:ext uri="{FF2B5EF4-FFF2-40B4-BE49-F238E27FC236}">
-                <a16:creationId xmlns:a16="http://schemas.microsoft.com/office/drawing/2014/main" id="{E40A85D4-AF6B-8028-2978-60E3B77BC7C5}"/>
+                <a16:creationId xmlns:a16="http://schemas.microsoft.com/office/drawing/2014/main" id="{FEF41A4F-E15E-BA7A-E5C6-ADC8B77B72E0}"/>
               </a:ext>
             </a:extLst>
           </p:cNvPr>
@@ -727,7 +727,7 @@
           <a:bodyPr/>
           <a:lstStyle/>
           <a:p>
-            <a:fld id="{0D330DDB-BE35-4E13-B23E-AA6D7DFAD045}" type="datetimeFigureOut">
+            <a:fld id="{010E6AA8-D6BB-41F2-AE78-BE6A7A3D2D3B}" type="datetimeFigureOut">
               <a:rPr kumimoji="1" lang="ja-JP" altLang="en-US" smtClean="0"/>
               <a:t>2026/7/30</a:t>
             </a:fld>
@@ -740,7 +740,7 @@
           <p:cNvPr id="5" name="フッター プレースホルダー 4">
             <a:extLst>
               <a:ext uri="{FF2B5EF4-FFF2-40B4-BE49-F238E27FC236}">
-                <a16:creationId xmlns:a16="http://schemas.microsoft.com/office/drawing/2014/main" id="{FF623A0F-BA93-3BDD-C3C9-3567B4CD4F85}"/>
+                <a16:creationId xmlns:a16="http://schemas.microsoft.com/office/drawing/2014/main" id="{A023D460-74B6-5923-B53C-F9793187356D}"/>
               </a:ext>
             </a:extLst>
           </p:cNvPr>
@@ -765,7 +765,7 @@
           <p:cNvPr id="6" name="スライド番号プレースホルダー 5">
             <a:extLst>
               <a:ext uri="{FF2B5EF4-FFF2-40B4-BE49-F238E27FC236}">
-                <a16:creationId xmlns:a16="http://schemas.microsoft.com/office/drawing/2014/main" id="{455A9E29-6B17-E42D-965C-7482A816CDB4}"/>
+                <a16:creationId xmlns:a16="http://schemas.microsoft.com/office/drawing/2014/main" id="{8824C033-F5C4-EB31-2F62-BE56801E9A65}"/>
               </a:ext>
             </a:extLst>
           </p:cNvPr>
@@ -781,7 +781,7 @@
           <a:bodyPr/>
           <a:lstStyle/>
           <a:p>
-            <a:fld id="{EA0B4B91-38E6-45A8-9CBA-F15391A01C9B}" type="slidenum">
+            <a:fld id="{F046617C-A62C-4724-ACC1-8C39C42291C8}" type="slidenum">
               <a:rPr kumimoji="1" lang="ja-JP" altLang="en-US" smtClean="0"/>
               <a:t>‹#›</a:t>
             </a:fld>
@@ -792,7 +792,7 @@
     </p:spTree>
     <p:extLst>
       <p:ext uri="{BB962C8B-B14F-4D97-AF65-F5344CB8AC3E}">
-        <p14:creationId xmlns:p14="http://schemas.microsoft.com/office/powerpoint/2010/main" val="3730388"/>
+        <p14:creationId xmlns:p14="http://schemas.microsoft.com/office/powerpoint/2010/main" val="1718785039"/>
       </p:ext>
     </p:extLst>
   </p:cSld>
@@ -824,7 +824,7 @@
           <p:cNvPr id="2" name="タイトル 1">
             <a:extLst>
               <a:ext uri="{FF2B5EF4-FFF2-40B4-BE49-F238E27FC236}">
-                <a16:creationId xmlns:a16="http://schemas.microsoft.com/office/drawing/2014/main" id="{1D11B11A-B8D4-46CC-8EA6-EE7F86D17F3A}"/>
+                <a16:creationId xmlns:a16="http://schemas.microsoft.com/office/drawing/2014/main" id="{D5A7D681-6CB3-7D87-9642-874192B94A85}"/>
               </a:ext>
             </a:extLst>
           </p:cNvPr>
@@ -852,7 +852,7 @@
           <p:cNvPr id="3" name="コンテンツ プレースホルダー 2">
             <a:extLst>
               <a:ext uri="{FF2B5EF4-FFF2-40B4-BE49-F238E27FC236}">
-                <a16:creationId xmlns:a16="http://schemas.microsoft.com/office/drawing/2014/main" id="{FE0C1CDD-7CEF-2703-C00C-C88A02B1CF1D}"/>
+                <a16:creationId xmlns:a16="http://schemas.microsoft.com/office/drawing/2014/main" id="{79EEB452-1866-D256-0A5E-303D1A6CEEC8}"/>
               </a:ext>
             </a:extLst>
           </p:cNvPr>
@@ -941,7 +941,7 @@
           <p:cNvPr id="4" name="日付プレースホルダー 3">
             <a:extLst>
               <a:ext uri="{FF2B5EF4-FFF2-40B4-BE49-F238E27FC236}">
-                <a16:creationId xmlns:a16="http://schemas.microsoft.com/office/drawing/2014/main" id="{3019BA8A-A6C4-DCE6-BBC7-367AB20A9672}"/>
+                <a16:creationId xmlns:a16="http://schemas.microsoft.com/office/drawing/2014/main" id="{32C22C01-A21F-864F-AD3C-17E6A2E7CBAD}"/>
               </a:ext>
             </a:extLst>
           </p:cNvPr>
@@ -957,7 +957,7 @@
           <a:bodyPr/>
           <a:lstStyle/>
           <a:p>
-            <a:fld id="{0D330DDB-BE35-4E13-B23E-AA6D7DFAD045}" type="datetimeFigureOut">
+            <a:fld id="{010E6AA8-D6BB-41F2-AE78-BE6A7A3D2D3B}" type="datetimeFigureOut">
               <a:rPr kumimoji="1" lang="ja-JP" altLang="en-US" smtClean="0"/>
               <a:t>2026/7/30</a:t>
             </a:fld>
@@ -970,7 +970,7 @@
           <p:cNvPr id="5" name="フッター プレースホルダー 4">
             <a:extLst>
               <a:ext uri="{FF2B5EF4-FFF2-40B4-BE49-F238E27FC236}">
-                <a16:creationId xmlns:a16="http://schemas.microsoft.com/office/drawing/2014/main" id="{1129916A-3771-2615-61F1-1524B3C91EA2}"/>
+                <a16:creationId xmlns:a16="http://schemas.microsoft.com/office/drawing/2014/main" id="{B3B2F18B-E8A8-4202-4CBF-6225B5B1E549}"/>
               </a:ext>
             </a:extLst>
           </p:cNvPr>
@@ -995,7 +995,7 @@
           <p:cNvPr id="6" name="スライド番号プレースホルダー 5">
             <a:extLst>
               <a:ext uri="{FF2B5EF4-FFF2-40B4-BE49-F238E27FC236}">
-                <a16:creationId xmlns:a16="http://schemas.microsoft.com/office/drawing/2014/main" id="{714B1141-8327-ACBC-9E77-7E9980F70DEA}"/>
+                <a16:creationId xmlns:a16="http://schemas.microsoft.com/office/drawing/2014/main" id="{BF44C432-69DB-EB2E-3E87-30EF93BBB2FE}"/>
               </a:ext>
             </a:extLst>
           </p:cNvPr>
@@ -1011,7 +1011,7 @@
           <a:bodyPr/>
           <a:lstStyle/>
           <a:p>
-            <a:fld id="{EA0B4B91-38E6-45A8-9CBA-F15391A01C9B}" type="slidenum">
+            <a:fld id="{F046617C-A62C-4724-ACC1-8C39C42291C8}" type="slidenum">
               <a:rPr kumimoji="1" lang="ja-JP" altLang="en-US" smtClean="0"/>
               <a:t>‹#›</a:t>
             </a:fld>
@@ -1022,7 +1022,7 @@
     </p:spTree>
     <p:extLst>
       <p:ext uri="{BB962C8B-B14F-4D97-AF65-F5344CB8AC3E}">
-        <p14:creationId xmlns:p14="http://schemas.microsoft.com/office/powerpoint/2010/main" val="700312884"/>
+        <p14:creationId xmlns:p14="http://schemas.microsoft.com/office/powerpoint/2010/main" val="2499078720"/>
       </p:ext>
     </p:extLst>
   </p:cSld>
@@ -1054,7 +1054,7 @@
           <p:cNvPr id="2" name="タイトル 1">
             <a:extLst>
               <a:ext uri="{FF2B5EF4-FFF2-40B4-BE49-F238E27FC236}">
-                <a16:creationId xmlns:a16="http://schemas.microsoft.com/office/drawing/2014/main" id="{30804962-2F14-A4B1-AA92-8727974FB4B2}"/>
+                <a16:creationId xmlns:a16="http://schemas.microsoft.com/office/drawing/2014/main" id="{688A9FBD-C22F-774C-7968-A78FA2742DB8}"/>
               </a:ext>
             </a:extLst>
           </p:cNvPr>
@@ -1091,7 +1091,7 @@
           <p:cNvPr id="3" name="テキスト プレースホルダー 2">
             <a:extLst>
               <a:ext uri="{FF2B5EF4-FFF2-40B4-BE49-F238E27FC236}">
-                <a16:creationId xmlns:a16="http://schemas.microsoft.com/office/drawing/2014/main" id="{47849D4F-04B2-D3DA-0E7A-53A0C66341F7}"/>
+                <a16:creationId xmlns:a16="http://schemas.microsoft.com/office/drawing/2014/main" id="{023AA5B7-58ED-5B61-2829-A99FA8CE2A89}"/>
               </a:ext>
             </a:extLst>
           </p:cNvPr>
@@ -1216,7 +1216,7 @@
           <p:cNvPr id="4" name="日付プレースホルダー 3">
             <a:extLst>
               <a:ext uri="{FF2B5EF4-FFF2-40B4-BE49-F238E27FC236}">
-                <a16:creationId xmlns:a16="http://schemas.microsoft.com/office/drawing/2014/main" id="{E698B2F9-918C-7659-341E-0B5A7E0B5EF9}"/>
+                <a16:creationId xmlns:a16="http://schemas.microsoft.com/office/drawing/2014/main" id="{A8745C38-6359-D4F5-5C48-2EEACF0C07F1}"/>
               </a:ext>
             </a:extLst>
           </p:cNvPr>
@@ -1232,7 +1232,7 @@
           <a:bodyPr/>
           <a:lstStyle/>
           <a:p>
-            <a:fld id="{0D330DDB-BE35-4E13-B23E-AA6D7DFAD045}" type="datetimeFigureOut">
+            <a:fld id="{010E6AA8-D6BB-41F2-AE78-BE6A7A3D2D3B}" type="datetimeFigureOut">
               <a:rPr kumimoji="1" lang="ja-JP" altLang="en-US" smtClean="0"/>
               <a:t>2026/7/30</a:t>
             </a:fld>
@@ -1245,7 +1245,7 @@
           <p:cNvPr id="5" name="フッター プレースホルダー 4">
             <a:extLst>
               <a:ext uri="{FF2B5EF4-FFF2-40B4-BE49-F238E27FC236}">
-                <a16:creationId xmlns:a16="http://schemas.microsoft.com/office/drawing/2014/main" id="{BF329F88-C00E-EFB1-44BC-508EF9D7BB46}"/>
+                <a16:creationId xmlns:a16="http://schemas.microsoft.com/office/drawing/2014/main" id="{0F850AB1-D06C-43C2-B8A2-2E3F0A921D42}"/>
               </a:ext>
             </a:extLst>
           </p:cNvPr>
@@ -1270,7 +1270,7 @@
           <p:cNvPr id="6" name="スライド番号プレースホルダー 5">
             <a:extLst>
               <a:ext uri="{FF2B5EF4-FFF2-40B4-BE49-F238E27FC236}">
-                <a16:creationId xmlns:a16="http://schemas.microsoft.com/office/drawing/2014/main" id="{3BBA6EE4-4A6F-C24A-C65A-BE9C7AAA2357}"/>
+                <a16:creationId xmlns:a16="http://schemas.microsoft.com/office/drawing/2014/main" id="{CBE8E567-0790-87CA-0B6D-F07888A06212}"/>
               </a:ext>
             </a:extLst>
           </p:cNvPr>
@@ -1286,7 +1286,7 @@
           <a:bodyPr/>
           <a:lstStyle/>
           <a:p>
-            <a:fld id="{EA0B4B91-38E6-45A8-9CBA-F15391A01C9B}" type="slidenum">
+            <a:fld id="{F046617C-A62C-4724-ACC1-8C39C42291C8}" type="slidenum">
               <a:rPr kumimoji="1" lang="ja-JP" altLang="en-US" smtClean="0"/>
               <a:t>‹#›</a:t>
             </a:fld>
@@ -1297,7 +1297,7 @@
     </p:spTree>
     <p:extLst>
       <p:ext uri="{BB962C8B-B14F-4D97-AF65-F5344CB8AC3E}">
-        <p14:creationId xmlns:p14="http://schemas.microsoft.com/office/powerpoint/2010/main" val="3236675314"/>
+        <p14:creationId xmlns:p14="http://schemas.microsoft.com/office/powerpoint/2010/main" val="1743975234"/>
       </p:ext>
     </p:extLst>
   </p:cSld>
@@ -1329,7 +1329,7 @@
           <p:cNvPr id="2" name="タイトル 1">
             <a:extLst>
               <a:ext uri="{FF2B5EF4-FFF2-40B4-BE49-F238E27FC236}">
-                <a16:creationId xmlns:a16="http://schemas.microsoft.com/office/drawing/2014/main" id="{30ECA783-3A96-FAC9-E253-80AEE5926D6D}"/>
+                <a16:creationId xmlns:a16="http://schemas.microsoft.com/office/drawing/2014/main" id="{FA859FCD-A93E-BFB5-6C5C-32C67EB05A2C}"/>
               </a:ext>
             </a:extLst>
           </p:cNvPr>
@@ -1357,7 +1357,7 @@
           <p:cNvPr id="3" name="コンテンツ プレースホルダー 2">
             <a:extLst>
               <a:ext uri="{FF2B5EF4-FFF2-40B4-BE49-F238E27FC236}">
-                <a16:creationId xmlns:a16="http://schemas.microsoft.com/office/drawing/2014/main" id="{1D74B2B6-498F-2706-9E18-F3DC522362FA}"/>
+                <a16:creationId xmlns:a16="http://schemas.microsoft.com/office/drawing/2014/main" id="{30E516C5-2C11-972C-8BDA-36B365A3FF8E}"/>
               </a:ext>
             </a:extLst>
           </p:cNvPr>
@@ -1451,7 +1451,7 @@
           <p:cNvPr id="4" name="コンテンツ プレースホルダー 3">
             <a:extLst>
               <a:ext uri="{FF2B5EF4-FFF2-40B4-BE49-F238E27FC236}">
-                <a16:creationId xmlns:a16="http://schemas.microsoft.com/office/drawing/2014/main" id="{85131160-0E64-3142-2313-591A61CE9FD8}"/>
+                <a16:creationId xmlns:a16="http://schemas.microsoft.com/office/drawing/2014/main" id="{48025968-607E-781C-7466-B4C61DBA4A0B}"/>
               </a:ext>
             </a:extLst>
           </p:cNvPr>
@@ -1545,7 +1545,7 @@
           <p:cNvPr id="5" name="日付プレースホルダー 4">
             <a:extLst>
               <a:ext uri="{FF2B5EF4-FFF2-40B4-BE49-F238E27FC236}">
-                <a16:creationId xmlns:a16="http://schemas.microsoft.com/office/drawing/2014/main" id="{F6732A14-1B62-C89C-FB40-36E747FC4810}"/>
+                <a16:creationId xmlns:a16="http://schemas.microsoft.com/office/drawing/2014/main" id="{E9C601DA-8057-A54A-EBBD-39796F5A0ACB}"/>
               </a:ext>
             </a:extLst>
           </p:cNvPr>
@@ -1561,7 +1561,7 @@
           <a:bodyPr/>
           <a:lstStyle/>
           <a:p>
-            <a:fld id="{0D330DDB-BE35-4E13-B23E-AA6D7DFAD045}" type="datetimeFigureOut">
+            <a:fld id="{010E6AA8-D6BB-41F2-AE78-BE6A7A3D2D3B}" type="datetimeFigureOut">
               <a:rPr kumimoji="1" lang="ja-JP" altLang="en-US" smtClean="0"/>
               <a:t>2026/7/30</a:t>
             </a:fld>
@@ -1574,7 +1574,7 @@
           <p:cNvPr id="6" name="フッター プレースホルダー 5">
             <a:extLst>
               <a:ext uri="{FF2B5EF4-FFF2-40B4-BE49-F238E27FC236}">
-                <a16:creationId xmlns:a16="http://schemas.microsoft.com/office/drawing/2014/main" id="{6340D9DA-2AB6-227B-3DC5-DCD7EE029651}"/>
+                <a16:creationId xmlns:a16="http://schemas.microsoft.com/office/drawing/2014/main" id="{81347BE7-D140-0537-E290-0849C16DD2E4}"/>
               </a:ext>
             </a:extLst>
           </p:cNvPr>
@@ -1599,7 +1599,7 @@
           <p:cNvPr id="7" name="スライド番号プレースホルダー 6">
             <a:extLst>
               <a:ext uri="{FF2B5EF4-FFF2-40B4-BE49-F238E27FC236}">
-                <a16:creationId xmlns:a16="http://schemas.microsoft.com/office/drawing/2014/main" id="{B08F8991-9CB1-4C08-9CC2-26E262545BC7}"/>
+                <a16:creationId xmlns:a16="http://schemas.microsoft.com/office/drawing/2014/main" id="{94F1C625-42FF-3321-F195-9EB959D3A22F}"/>
               </a:ext>
             </a:extLst>
           </p:cNvPr>
@@ -1615,7 +1615,7 @@
           <a:bodyPr/>
           <a:lstStyle/>
           <a:p>
-            <a:fld id="{EA0B4B91-38E6-45A8-9CBA-F15391A01C9B}" type="slidenum">
+            <a:fld id="{F046617C-A62C-4724-ACC1-8C39C42291C8}" type="slidenum">
               <a:rPr kumimoji="1" lang="ja-JP" altLang="en-US" smtClean="0"/>
               <a:t>‹#›</a:t>
             </a:fld>
@@ -1626,7 +1626,7 @@
     </p:spTree>
     <p:extLst>
       <p:ext uri="{BB962C8B-B14F-4D97-AF65-F5344CB8AC3E}">
-        <p14:creationId xmlns:p14="http://schemas.microsoft.com/office/powerpoint/2010/main" val="1267389340"/>
+        <p14:creationId xmlns:p14="http://schemas.microsoft.com/office/powerpoint/2010/main" val="4046826602"/>
       </p:ext>
     </p:extLst>
   </p:cSld>
@@ -1658,7 +1658,7 @@
           <p:cNvPr id="2" name="タイトル 1">
             <a:extLst>
               <a:ext uri="{FF2B5EF4-FFF2-40B4-BE49-F238E27FC236}">
-                <a16:creationId xmlns:a16="http://schemas.microsoft.com/office/drawing/2014/main" id="{82D0C51E-1842-0191-09F6-AC48F7E528FC}"/>
+                <a16:creationId xmlns:a16="http://schemas.microsoft.com/office/drawing/2014/main" id="{0A21DD17-0201-09EF-987C-BE5DE85FEB25}"/>
               </a:ext>
             </a:extLst>
           </p:cNvPr>
@@ -1691,7 +1691,7 @@
           <p:cNvPr id="3" name="テキスト プレースホルダー 2">
             <a:extLst>
               <a:ext uri="{FF2B5EF4-FFF2-40B4-BE49-F238E27FC236}">
-                <a16:creationId xmlns:a16="http://schemas.microsoft.com/office/drawing/2014/main" id="{D60DD70F-BDA0-AFDA-6866-7EC9B2616950}"/>
+                <a16:creationId xmlns:a16="http://schemas.microsoft.com/office/drawing/2014/main" id="{06E297FD-89CC-7568-2BCE-36BB2315E583}"/>
               </a:ext>
             </a:extLst>
           </p:cNvPr>
@@ -1762,7 +1762,7 @@
           <p:cNvPr id="4" name="コンテンツ プレースホルダー 3">
             <a:extLst>
               <a:ext uri="{FF2B5EF4-FFF2-40B4-BE49-F238E27FC236}">
-                <a16:creationId xmlns:a16="http://schemas.microsoft.com/office/drawing/2014/main" id="{F75FF800-4644-E442-2278-6BA77C8646D0}"/>
+                <a16:creationId xmlns:a16="http://schemas.microsoft.com/office/drawing/2014/main" id="{238008A0-BBE3-9253-E132-E927A695A7CD}"/>
               </a:ext>
             </a:extLst>
           </p:cNvPr>
@@ -1856,7 +1856,7 @@
           <p:cNvPr id="5" name="テキスト プレースホルダー 4">
             <a:extLst>
               <a:ext uri="{FF2B5EF4-FFF2-40B4-BE49-F238E27FC236}">
-                <a16:creationId xmlns:a16="http://schemas.microsoft.com/office/drawing/2014/main" id="{566E6265-4880-EC7C-69FA-CECFE1916A65}"/>
+                <a16:creationId xmlns:a16="http://schemas.microsoft.com/office/drawing/2014/main" id="{674F1EC2-023D-B4F9-E4FD-9642B0FE40C6}"/>
               </a:ext>
             </a:extLst>
           </p:cNvPr>
@@ -1927,7 +1927,7 @@
           <p:cNvPr id="6" name="コンテンツ プレースホルダー 5">
             <a:extLst>
               <a:ext uri="{FF2B5EF4-FFF2-40B4-BE49-F238E27FC236}">
-                <a16:creationId xmlns:a16="http://schemas.microsoft.com/office/drawing/2014/main" id="{99CB64B6-14E3-C7EF-06B0-BBBD611FDD62}"/>
+                <a16:creationId xmlns:a16="http://schemas.microsoft.com/office/drawing/2014/main" id="{C83A788A-284B-897B-877E-B5D053F37E80}"/>
               </a:ext>
             </a:extLst>
           </p:cNvPr>
@@ -2021,7 +2021,7 @@
           <p:cNvPr id="7" name="日付プレースホルダー 6">
             <a:extLst>
               <a:ext uri="{FF2B5EF4-FFF2-40B4-BE49-F238E27FC236}">
-                <a16:creationId xmlns:a16="http://schemas.microsoft.com/office/drawing/2014/main" id="{7CDE2E08-36E6-051B-7630-C0F1416832C5}"/>
+                <a16:creationId xmlns:a16="http://schemas.microsoft.com/office/drawing/2014/main" id="{73D4CF37-BD3C-6014-B30C-AAB425635165}"/>
               </a:ext>
             </a:extLst>
           </p:cNvPr>
@@ -2037,7 +2037,7 @@
           <a:bodyPr/>
           <a:lstStyle/>
           <a:p>
-            <a:fld id="{0D330DDB-BE35-4E13-B23E-AA6D7DFAD045}" type="datetimeFigureOut">
+            <a:fld id="{010E6AA8-D6BB-41F2-AE78-BE6A7A3D2D3B}" type="datetimeFigureOut">
               <a:rPr kumimoji="1" lang="ja-JP" altLang="en-US" smtClean="0"/>
               <a:t>2026/7/30</a:t>
             </a:fld>
@@ -2050,7 +2050,7 @@
           <p:cNvPr id="8" name="フッター プレースホルダー 7">
             <a:extLst>
               <a:ext uri="{FF2B5EF4-FFF2-40B4-BE49-F238E27FC236}">
-                <a16:creationId xmlns:a16="http://schemas.microsoft.com/office/drawing/2014/main" id="{5E8485B8-6DD8-7D63-E060-1BC20BEA0528}"/>
+                <a16:creationId xmlns:a16="http://schemas.microsoft.com/office/drawing/2014/main" id="{A6025B26-ADBB-C9AB-B5BA-4F150199DAF9}"/>
               </a:ext>
             </a:extLst>
           </p:cNvPr>
@@ -2075,7 +2075,7 @@
           <p:cNvPr id="9" name="スライド番号プレースホルダー 8">
             <a:extLst>
               <a:ext uri="{FF2B5EF4-FFF2-40B4-BE49-F238E27FC236}">
-                <a16:creationId xmlns:a16="http://schemas.microsoft.com/office/drawing/2014/main" id="{1D064FB9-B586-CE91-2CFA-4EAA335E8503}"/>
+                <a16:creationId xmlns:a16="http://schemas.microsoft.com/office/drawing/2014/main" id="{A6D3F964-E812-D2BC-F7D4-0D6C922989E8}"/>
               </a:ext>
             </a:extLst>
           </p:cNvPr>
@@ -2091,7 +2091,7 @@
           <a:bodyPr/>
           <a:lstStyle/>
           <a:p>
-            <a:fld id="{EA0B4B91-38E6-45A8-9CBA-F15391A01C9B}" type="slidenum">
+            <a:fld id="{F046617C-A62C-4724-ACC1-8C39C42291C8}" type="slidenum">
               <a:rPr kumimoji="1" lang="ja-JP" altLang="en-US" smtClean="0"/>
               <a:t>‹#›</a:t>
             </a:fld>
@@ -2102,7 +2102,7 @@
     </p:spTree>
     <p:extLst>
       <p:ext uri="{BB962C8B-B14F-4D97-AF65-F5344CB8AC3E}">
-        <p14:creationId xmlns:p14="http://schemas.microsoft.com/office/powerpoint/2010/main" val="3451490305"/>
+        <p14:creationId xmlns:p14="http://schemas.microsoft.com/office/powerpoint/2010/main" val="2966143116"/>
       </p:ext>
     </p:extLst>
   </p:cSld>
@@ -2134,7 +2134,7 @@
           <p:cNvPr id="2" name="タイトル 1">
             <a:extLst>
               <a:ext uri="{FF2B5EF4-FFF2-40B4-BE49-F238E27FC236}">
-                <a16:creationId xmlns:a16="http://schemas.microsoft.com/office/drawing/2014/main" id="{D6062124-455B-91A9-2BFA-494872A6A2B5}"/>
+                <a16:creationId xmlns:a16="http://schemas.microsoft.com/office/drawing/2014/main" id="{3F943DE1-E1E7-8356-0D56-21185C118D97}"/>
               </a:ext>
             </a:extLst>
           </p:cNvPr>
@@ -2162,7 +2162,7 @@
           <p:cNvPr id="3" name="日付プレースホルダー 2">
             <a:extLst>
               <a:ext uri="{FF2B5EF4-FFF2-40B4-BE49-F238E27FC236}">
-                <a16:creationId xmlns:a16="http://schemas.microsoft.com/office/drawing/2014/main" id="{1048D21C-8DC5-B600-6389-B1CA48956659}"/>
+                <a16:creationId xmlns:a16="http://schemas.microsoft.com/office/drawing/2014/main" id="{C1EA3AE8-0F9A-55D6-D36F-2F90CDFE7EBF}"/>
               </a:ext>
             </a:extLst>
           </p:cNvPr>
@@ -2178,7 +2178,7 @@
           <a:bodyPr/>
           <a:lstStyle/>
           <a:p>
-            <a:fld id="{0D330DDB-BE35-4E13-B23E-AA6D7DFAD045}" type="datetimeFigureOut">
+            <a:fld id="{010E6AA8-D6BB-41F2-AE78-BE6A7A3D2D3B}" type="datetimeFigureOut">
               <a:rPr kumimoji="1" lang="ja-JP" altLang="en-US" smtClean="0"/>
               <a:t>2026/7/30</a:t>
             </a:fld>
@@ -2191,7 +2191,7 @@
           <p:cNvPr id="4" name="フッター プレースホルダー 3">
             <a:extLst>
               <a:ext uri="{FF2B5EF4-FFF2-40B4-BE49-F238E27FC236}">
-                <a16:creationId xmlns:a16="http://schemas.microsoft.com/office/drawing/2014/main" id="{8CD54412-6D58-FBFC-9A84-A1349585E35D}"/>
+                <a16:creationId xmlns:a16="http://schemas.microsoft.com/office/drawing/2014/main" id="{659CF4B9-3CFD-2F97-E142-E185E5C2FCF9}"/>
               </a:ext>
             </a:extLst>
           </p:cNvPr>
@@ -2216,7 +2216,7 @@
           <p:cNvPr id="5" name="スライド番号プレースホルダー 4">
             <a:extLst>
               <a:ext uri="{FF2B5EF4-FFF2-40B4-BE49-F238E27FC236}">
-                <a16:creationId xmlns:a16="http://schemas.microsoft.com/office/drawing/2014/main" id="{AB133B6D-D56D-E759-B165-A2DD18F57888}"/>
+                <a16:creationId xmlns:a16="http://schemas.microsoft.com/office/drawing/2014/main" id="{80646016-BB52-71A1-05CD-CDB28A5F7BB6}"/>
               </a:ext>
             </a:extLst>
           </p:cNvPr>
@@ -2232,7 +2232,7 @@
           <a:bodyPr/>
           <a:lstStyle/>
           <a:p>
-            <a:fld id="{EA0B4B91-38E6-45A8-9CBA-F15391A01C9B}" type="slidenum">
+            <a:fld id="{F046617C-A62C-4724-ACC1-8C39C42291C8}" type="slidenum">
               <a:rPr kumimoji="1" lang="ja-JP" altLang="en-US" smtClean="0"/>
               <a:t>‹#›</a:t>
             </a:fld>
@@ -2243,7 +2243,7 @@
     </p:spTree>
     <p:extLst>
       <p:ext uri="{BB962C8B-B14F-4D97-AF65-F5344CB8AC3E}">
-        <p14:creationId xmlns:p14="http://schemas.microsoft.com/office/powerpoint/2010/main" val="2239601473"/>
+        <p14:creationId xmlns:p14="http://schemas.microsoft.com/office/powerpoint/2010/main" val="3630377205"/>
       </p:ext>
     </p:extLst>
   </p:cSld>
@@ -2275,7 +2275,7 @@
           <p:cNvPr id="2" name="日付プレースホルダー 1">
             <a:extLst>
               <a:ext uri="{FF2B5EF4-FFF2-40B4-BE49-F238E27FC236}">
-                <a16:creationId xmlns:a16="http://schemas.microsoft.com/office/drawing/2014/main" id="{AFCA44C3-24BC-BBD8-1E76-A72F65F04361}"/>
+                <a16:creationId xmlns:a16="http://schemas.microsoft.com/office/drawing/2014/main" id="{7DAA4F5A-5CBD-43AA-76F7-DDE39E9D7381}"/>
               </a:ext>
             </a:extLst>
           </p:cNvPr>
@@ -2291,7 +2291,7 @@
           <a:bodyPr/>
           <a:lstStyle/>
           <a:p>
-            <a:fld id="{0D330DDB-BE35-4E13-B23E-AA6D7DFAD045}" type="datetimeFigureOut">
+            <a:fld id="{010E6AA8-D6BB-41F2-AE78-BE6A7A3D2D3B}" type="datetimeFigureOut">
               <a:rPr kumimoji="1" lang="ja-JP" altLang="en-US" smtClean="0"/>
               <a:t>2026/7/30</a:t>
             </a:fld>
@@ -2304,7 +2304,7 @@
           <p:cNvPr id="3" name="フッター プレースホルダー 2">
             <a:extLst>
               <a:ext uri="{FF2B5EF4-FFF2-40B4-BE49-F238E27FC236}">
-                <a16:creationId xmlns:a16="http://schemas.microsoft.com/office/drawing/2014/main" id="{0DFEC458-47B8-A3C7-47B2-A75B098BCCCA}"/>
+                <a16:creationId xmlns:a16="http://schemas.microsoft.com/office/drawing/2014/main" id="{29864A2F-7E13-538F-324B-A712B9E0F0ED}"/>
               </a:ext>
             </a:extLst>
           </p:cNvPr>
@@ -2329,7 +2329,7 @@
           <p:cNvPr id="4" name="スライド番号プレースホルダー 3">
             <a:extLst>
               <a:ext uri="{FF2B5EF4-FFF2-40B4-BE49-F238E27FC236}">
-                <a16:creationId xmlns:a16="http://schemas.microsoft.com/office/drawing/2014/main" id="{67BE365B-3C96-C7C2-7C57-D87A20928EE7}"/>
+                <a16:creationId xmlns:a16="http://schemas.microsoft.com/office/drawing/2014/main" id="{0D39D0AC-F7BC-6666-6316-DBAAF0B9013B}"/>
               </a:ext>
             </a:extLst>
           </p:cNvPr>
@@ -2345,7 +2345,7 @@
           <a:bodyPr/>
           <a:lstStyle/>
           <a:p>
-            <a:fld id="{EA0B4B91-38E6-45A8-9CBA-F15391A01C9B}" type="slidenum">
+            <a:fld id="{F046617C-A62C-4724-ACC1-8C39C42291C8}" type="slidenum">
               <a:rPr kumimoji="1" lang="ja-JP" altLang="en-US" smtClean="0"/>
               <a:t>‹#›</a:t>
             </a:fld>
@@ -2356,7 +2356,7 @@
     </p:spTree>
     <p:extLst>
       <p:ext uri="{BB962C8B-B14F-4D97-AF65-F5344CB8AC3E}">
-        <p14:creationId xmlns:p14="http://schemas.microsoft.com/office/powerpoint/2010/main" val="1560793904"/>
+        <p14:creationId xmlns:p14="http://schemas.microsoft.com/office/powerpoint/2010/main" val="134433041"/>
       </p:ext>
     </p:extLst>
   </p:cSld>
@@ -2388,7 +2388,7 @@
           <p:cNvPr id="2" name="タイトル 1">
             <a:extLst>
               <a:ext uri="{FF2B5EF4-FFF2-40B4-BE49-F238E27FC236}">
-                <a16:creationId xmlns:a16="http://schemas.microsoft.com/office/drawing/2014/main" id="{52233544-4F49-C34D-C971-75E3DF7EF665}"/>
+                <a16:creationId xmlns:a16="http://schemas.microsoft.com/office/drawing/2014/main" id="{8B43AB7B-C9B0-BBC5-F90D-3CACDF648370}"/>
               </a:ext>
             </a:extLst>
           </p:cNvPr>
@@ -2425,7 +2425,7 @@
           <p:cNvPr id="3" name="コンテンツ プレースホルダー 2">
             <a:extLst>
               <a:ext uri="{FF2B5EF4-FFF2-40B4-BE49-F238E27FC236}">
-                <a16:creationId xmlns:a16="http://schemas.microsoft.com/office/drawing/2014/main" id="{DF08AD57-9A1C-52CD-6FA5-05189FD12076}"/>
+                <a16:creationId xmlns:a16="http://schemas.microsoft.com/office/drawing/2014/main" id="{0CE98AC5-E271-2D45-7678-9EB35C0F3B26}"/>
               </a:ext>
             </a:extLst>
           </p:cNvPr>
@@ -2547,7 +2547,7 @@
           <p:cNvPr id="4" name="テキスト プレースホルダー 3">
             <a:extLst>
               <a:ext uri="{FF2B5EF4-FFF2-40B4-BE49-F238E27FC236}">
-                <a16:creationId xmlns:a16="http://schemas.microsoft.com/office/drawing/2014/main" id="{1F33FBBF-06A5-1C10-CF6A-56A699334E15}"/>
+                <a16:creationId xmlns:a16="http://schemas.microsoft.com/office/drawing/2014/main" id="{592ABF8A-A4E9-5C03-FF21-9FD631345B3D}"/>
               </a:ext>
             </a:extLst>
           </p:cNvPr>
@@ -2618,7 +2618,7 @@
           <p:cNvPr id="5" name="日付プレースホルダー 4">
             <a:extLst>
               <a:ext uri="{FF2B5EF4-FFF2-40B4-BE49-F238E27FC236}">
-                <a16:creationId xmlns:a16="http://schemas.microsoft.com/office/drawing/2014/main" id="{15E70069-464F-D264-5337-CDD76899CC6C}"/>
+                <a16:creationId xmlns:a16="http://schemas.microsoft.com/office/drawing/2014/main" id="{47A9F89E-6DBF-811C-5C02-E56AEDEEF90E}"/>
               </a:ext>
             </a:extLst>
           </p:cNvPr>
@@ -2634,7 +2634,7 @@
           <a:bodyPr/>
           <a:lstStyle/>
           <a:p>
-            <a:fld id="{0D330DDB-BE35-4E13-B23E-AA6D7DFAD045}" type="datetimeFigureOut">
+            <a:fld id="{010E6AA8-D6BB-41F2-AE78-BE6A7A3D2D3B}" type="datetimeFigureOut">
               <a:rPr kumimoji="1" lang="ja-JP" altLang="en-US" smtClean="0"/>
               <a:t>2026/7/30</a:t>
             </a:fld>
@@ -2647,7 +2647,7 @@
           <p:cNvPr id="6" name="フッター プレースホルダー 5">
             <a:extLst>
               <a:ext uri="{FF2B5EF4-FFF2-40B4-BE49-F238E27FC236}">
-                <a16:creationId xmlns:a16="http://schemas.microsoft.com/office/drawing/2014/main" id="{D9584BA6-0687-6C55-2271-FA20723829B2}"/>
+                <a16:creationId xmlns:a16="http://schemas.microsoft.com/office/drawing/2014/main" id="{0B3525CC-1B4C-56A1-1AB6-894243FE57BF}"/>
               </a:ext>
             </a:extLst>
           </p:cNvPr>
@@ -2672,7 +2672,7 @@
           <p:cNvPr id="7" name="スライド番号プレースホルダー 6">
             <a:extLst>
               <a:ext uri="{FF2B5EF4-FFF2-40B4-BE49-F238E27FC236}">
-                <a16:creationId xmlns:a16="http://schemas.microsoft.com/office/drawing/2014/main" id="{0A84167E-5532-08DF-C67C-64E94CB90866}"/>
+                <a16:creationId xmlns:a16="http://schemas.microsoft.com/office/drawing/2014/main" id="{BFD2982A-5A6D-43CF-C5EE-D484115170C5}"/>
               </a:ext>
             </a:extLst>
           </p:cNvPr>
@@ -2688,7 +2688,7 @@
           <a:bodyPr/>
           <a:lstStyle/>
           <a:p>
-            <a:fld id="{EA0B4B91-38E6-45A8-9CBA-F15391A01C9B}" type="slidenum">
+            <a:fld id="{F046617C-A62C-4724-ACC1-8C39C42291C8}" type="slidenum">
               <a:rPr kumimoji="1" lang="ja-JP" altLang="en-US" smtClean="0"/>
               <a:t>‹#›</a:t>
             </a:fld>
@@ -2699,7 +2699,7 @@
     </p:spTree>
     <p:extLst>
       <p:ext uri="{BB962C8B-B14F-4D97-AF65-F5344CB8AC3E}">
-        <p14:creationId xmlns:p14="http://schemas.microsoft.com/office/powerpoint/2010/main" val="1934646369"/>
+        <p14:creationId xmlns:p14="http://schemas.microsoft.com/office/powerpoint/2010/main" val="1203344211"/>
       </p:ext>
     </p:extLst>
   </p:cSld>
@@ -2731,7 +2731,7 @@
           <p:cNvPr id="2" name="タイトル 1">
             <a:extLst>
               <a:ext uri="{FF2B5EF4-FFF2-40B4-BE49-F238E27FC236}">
-                <a16:creationId xmlns:a16="http://schemas.microsoft.com/office/drawing/2014/main" id="{4FFDC751-E3E4-D810-A8AB-A165BCF036B1}"/>
+                <a16:creationId xmlns:a16="http://schemas.microsoft.com/office/drawing/2014/main" id="{6C99D6DE-8335-D87D-4B0F-4B871861B6F7}"/>
               </a:ext>
             </a:extLst>
           </p:cNvPr>
@@ -2768,7 +2768,7 @@
           <p:cNvPr id="3" name="図プレースホルダー 2">
             <a:extLst>
               <a:ext uri="{FF2B5EF4-FFF2-40B4-BE49-F238E27FC236}">
-                <a16:creationId xmlns:a16="http://schemas.microsoft.com/office/drawing/2014/main" id="{3C85AE25-B295-B856-8975-427997F842C4}"/>
+                <a16:creationId xmlns:a16="http://schemas.microsoft.com/office/drawing/2014/main" id="{318229B6-3C9B-85EA-DB03-C020D8C7A4EB}"/>
               </a:ext>
             </a:extLst>
           </p:cNvPr>
@@ -2835,7 +2835,7 @@
           <p:cNvPr id="4" name="テキスト プレースホルダー 3">
             <a:extLst>
               <a:ext uri="{FF2B5EF4-FFF2-40B4-BE49-F238E27FC236}">
-                <a16:creationId xmlns:a16="http://schemas.microsoft.com/office/drawing/2014/main" id="{6079F99A-D3DB-BABD-365E-836017465485}"/>
+                <a16:creationId xmlns:a16="http://schemas.microsoft.com/office/drawing/2014/main" id="{E0D2BD6D-D526-A7D0-1AB5-2CE2F6102551}"/>
               </a:ext>
             </a:extLst>
           </p:cNvPr>
@@ -2906,7 +2906,7 @@
           <p:cNvPr id="5" name="日付プレースホルダー 4">
             <a:extLst>
               <a:ext uri="{FF2B5EF4-FFF2-40B4-BE49-F238E27FC236}">
-                <a16:creationId xmlns:a16="http://schemas.microsoft.com/office/drawing/2014/main" id="{80013E67-79B7-EB78-48F7-F9BE1739AAE5}"/>
+                <a16:creationId xmlns:a16="http://schemas.microsoft.com/office/drawing/2014/main" id="{EF200CCE-10E0-998B-83BB-12C772EC6179}"/>
               </a:ext>
             </a:extLst>
           </p:cNvPr>
@@ -2922,7 +2922,7 @@
           <a:bodyPr/>
           <a:lstStyle/>
           <a:p>
-            <a:fld id="{0D330DDB-BE35-4E13-B23E-AA6D7DFAD045}" type="datetimeFigureOut">
+            <a:fld id="{010E6AA8-D6BB-41F2-AE78-BE6A7A3D2D3B}" type="datetimeFigureOut">
               <a:rPr kumimoji="1" lang="ja-JP" altLang="en-US" smtClean="0"/>
               <a:t>2026/7/30</a:t>
             </a:fld>
@@ -2935,7 +2935,7 @@
           <p:cNvPr id="6" name="フッター プレースホルダー 5">
             <a:extLst>
               <a:ext uri="{FF2B5EF4-FFF2-40B4-BE49-F238E27FC236}">
-                <a16:creationId xmlns:a16="http://schemas.microsoft.com/office/drawing/2014/main" id="{6DC15CE1-EB03-6978-3341-05C6CFEC0DA0}"/>
+                <a16:creationId xmlns:a16="http://schemas.microsoft.com/office/drawing/2014/main" id="{24ED6962-22C1-A24F-FAB1-6E49555E1ACD}"/>
               </a:ext>
             </a:extLst>
           </p:cNvPr>
@@ -2960,7 +2960,7 @@
           <p:cNvPr id="7" name="スライド番号プレースホルダー 6">
             <a:extLst>
               <a:ext uri="{FF2B5EF4-FFF2-40B4-BE49-F238E27FC236}">
-                <a16:creationId xmlns:a16="http://schemas.microsoft.com/office/drawing/2014/main" id="{F3ACBA54-A988-B6A4-0613-DF7CB90ADBAA}"/>
+                <a16:creationId xmlns:a16="http://schemas.microsoft.com/office/drawing/2014/main" id="{E1507C43-AD92-68BF-F600-3B0DAE078995}"/>
               </a:ext>
             </a:extLst>
           </p:cNvPr>
@@ -2976,7 +2976,7 @@
           <a:bodyPr/>
           <a:lstStyle/>
           <a:p>
-            <a:fld id="{EA0B4B91-38E6-45A8-9CBA-F15391A01C9B}" type="slidenum">
+            <a:fld id="{F046617C-A62C-4724-ACC1-8C39C42291C8}" type="slidenum">
               <a:rPr kumimoji="1" lang="ja-JP" altLang="en-US" smtClean="0"/>
               <a:t>‹#›</a:t>
             </a:fld>
@@ -2987,7 +2987,7 @@
     </p:spTree>
     <p:extLst>
       <p:ext uri="{BB962C8B-B14F-4D97-AF65-F5344CB8AC3E}">
-        <p14:creationId xmlns:p14="http://schemas.microsoft.com/office/powerpoint/2010/main" val="302949357"/>
+        <p14:creationId xmlns:p14="http://schemas.microsoft.com/office/powerpoint/2010/main" val="1688367254"/>
       </p:ext>
     </p:extLst>
   </p:cSld>
@@ -3024,7 +3024,7 @@
           <p:cNvPr id="2" name="タイトル プレースホルダー 1">
             <a:extLst>
               <a:ext uri="{FF2B5EF4-FFF2-40B4-BE49-F238E27FC236}">
-                <a16:creationId xmlns:a16="http://schemas.microsoft.com/office/drawing/2014/main" id="{15E14B83-647B-C3BB-292E-5EC898B98AF4}"/>
+                <a16:creationId xmlns:a16="http://schemas.microsoft.com/office/drawing/2014/main" id="{F2FF99F9-783D-141A-C1D6-84DEF51E2634}"/>
               </a:ext>
             </a:extLst>
           </p:cNvPr>
@@ -3062,7 +3062,7 @@
           <p:cNvPr id="3" name="テキスト プレースホルダー 2">
             <a:extLst>
               <a:ext uri="{FF2B5EF4-FFF2-40B4-BE49-F238E27FC236}">
-                <a16:creationId xmlns:a16="http://schemas.microsoft.com/office/drawing/2014/main" id="{A55C8DB3-C267-3BE8-2047-6EBCA87AA4FA}"/>
+                <a16:creationId xmlns:a16="http://schemas.microsoft.com/office/drawing/2014/main" id="{FDABB09D-B128-60DB-C09A-406263D3645B}"/>
               </a:ext>
             </a:extLst>
           </p:cNvPr>
@@ -3161,7 +3161,7 @@
           <p:cNvPr id="4" name="日付プレースホルダー 3">
             <a:extLst>
               <a:ext uri="{FF2B5EF4-FFF2-40B4-BE49-F238E27FC236}">
-                <a16:creationId xmlns:a16="http://schemas.microsoft.com/office/drawing/2014/main" id="{7F340654-2AEB-CD5A-5AEE-045E19D35C8D}"/>
+                <a16:creationId xmlns:a16="http://schemas.microsoft.com/office/drawing/2014/main" id="{A3C952C1-C162-2A5E-3D59-49CB4E99D80C}"/>
               </a:ext>
             </a:extLst>
           </p:cNvPr>
@@ -3195,7 +3195,7 @@
             </a:lvl1pPr>
           </a:lstStyle>
           <a:p>
-            <a:fld id="{0D330DDB-BE35-4E13-B23E-AA6D7DFAD045}" type="datetimeFigureOut">
+            <a:fld id="{010E6AA8-D6BB-41F2-AE78-BE6A7A3D2D3B}" type="datetimeFigureOut">
               <a:rPr kumimoji="1" lang="ja-JP" altLang="en-US" smtClean="0"/>
               <a:t>2026/7/30</a:t>
             </a:fld>
@@ -3208,7 +3208,7 @@
           <p:cNvPr id="5" name="フッター プレースホルダー 4">
             <a:extLst>
               <a:ext uri="{FF2B5EF4-FFF2-40B4-BE49-F238E27FC236}">
-                <a16:creationId xmlns:a16="http://schemas.microsoft.com/office/drawing/2014/main" id="{97957B23-5DD5-E709-7E3D-2D1DD141D96B}"/>
+                <a16:creationId xmlns:a16="http://schemas.microsoft.com/office/drawing/2014/main" id="{55158AAD-BB94-0571-3EEE-B6084345D953}"/>
               </a:ext>
             </a:extLst>
           </p:cNvPr>
@@ -3251,7 +3251,7 @@
           <p:cNvPr id="6" name="スライド番号プレースホルダー 5">
             <a:extLst>
               <a:ext uri="{FF2B5EF4-FFF2-40B4-BE49-F238E27FC236}">
-                <a16:creationId xmlns:a16="http://schemas.microsoft.com/office/drawing/2014/main" id="{6F2C69EC-EDA8-3EEC-CC76-4C57DA47D33C}"/>
+                <a16:creationId xmlns:a16="http://schemas.microsoft.com/office/drawing/2014/main" id="{B548FADB-E328-A8D9-73EC-51090C37C626}"/>
               </a:ext>
             </a:extLst>
           </p:cNvPr>
@@ -3285,7 +3285,7 @@
             </a:lvl1pPr>
           </a:lstStyle>
           <a:p>
-            <a:fld id="{EA0B4B91-38E6-45A8-9CBA-F15391A01C9B}" type="slidenum">
+            <a:fld id="{F046617C-A62C-4724-ACC1-8C39C42291C8}" type="slidenum">
               <a:rPr kumimoji="1" lang="ja-JP" altLang="en-US" smtClean="0"/>
               <a:t>‹#›</a:t>
             </a:fld>
@@ -3296,7 +3296,7 @@
     </p:spTree>
     <p:extLst>
       <p:ext uri="{BB962C8B-B14F-4D97-AF65-F5344CB8AC3E}">
-        <p14:creationId xmlns:p14="http://schemas.microsoft.com/office/powerpoint/2010/main" val="3539126680"/>
+        <p14:creationId xmlns:p14="http://schemas.microsoft.com/office/powerpoint/2010/main" val="867269281"/>
       </p:ext>
     </p:extLst>
   </p:cSld>
@@ -3619,7 +3619,7 @@
           <p:cNvPr id="2" name="テキスト ボックス 1">
             <a:extLst>
               <a:ext uri="{FF2B5EF4-FFF2-40B4-BE49-F238E27FC236}">
-                <a16:creationId xmlns:a16="http://schemas.microsoft.com/office/drawing/2014/main" id="{1A7A1F07-6F05-E5BB-202B-90E0C4ACFEE4}"/>
+                <a16:creationId xmlns:a16="http://schemas.microsoft.com/office/drawing/2014/main" id="{FFA42EF8-306D-8791-0145-3FEAC45F80D5}"/>
               </a:ext>
             </a:extLst>
           </p:cNvPr>
@@ -3665,7 +3665,7 @@
           <p:cNvPr id="3" name="テキスト ボックス 2">
             <a:extLst>
               <a:ext uri="{FF2B5EF4-FFF2-40B4-BE49-F238E27FC236}">
-                <a16:creationId xmlns:a16="http://schemas.microsoft.com/office/drawing/2014/main" id="{66D8DFBA-089D-00C8-918A-37D0A4D423D3}"/>
+                <a16:creationId xmlns:a16="http://schemas.microsoft.com/office/drawing/2014/main" id="{2A9FAC37-99C4-3E7E-2458-D0BE0357D15C}"/>
               </a:ext>
             </a:extLst>
           </p:cNvPr>
@@ -3714,7 +3714,7 @@
           <p:cNvPr id="4" name="テキスト ボックス 3">
             <a:extLst>
               <a:ext uri="{FF2B5EF4-FFF2-40B4-BE49-F238E27FC236}">
-                <a16:creationId xmlns:a16="http://schemas.microsoft.com/office/drawing/2014/main" id="{3272AB4F-BD85-8706-D738-FFAD3DE13C03}"/>
+                <a16:creationId xmlns:a16="http://schemas.microsoft.com/office/drawing/2014/main" id="{DD686EAF-BCF0-AC20-1F31-101CA722DF0A}"/>
               </a:ext>
             </a:extLst>
           </p:cNvPr>
@@ -3754,7 +3754,7 @@
           <p:cNvPr id="5" name="テキスト ボックス 4">
             <a:extLst>
               <a:ext uri="{FF2B5EF4-FFF2-40B4-BE49-F238E27FC236}">
-                <a16:creationId xmlns:a16="http://schemas.microsoft.com/office/drawing/2014/main" id="{C8BF038A-B6D8-ED34-EC5C-3F68A0086D93}"/>
+                <a16:creationId xmlns:a16="http://schemas.microsoft.com/office/drawing/2014/main" id="{447675F9-4B95-65F1-2EE8-DC8F3255A0EB}"/>
               </a:ext>
             </a:extLst>
           </p:cNvPr>
@@ -3801,7 +3801,7 @@
             <a:hlinkClick r:id="" action="ppaction://media"/>
             <a:extLst>
               <a:ext uri="{FF2B5EF4-FFF2-40B4-BE49-F238E27FC236}">
-                <a16:creationId xmlns:a16="http://schemas.microsoft.com/office/drawing/2014/main" id="{E4F18A63-B1AF-FF31-6BB6-BFF62A49AF9C}"/>
+                <a16:creationId xmlns:a16="http://schemas.microsoft.com/office/drawing/2014/main" id="{0CA3BEB1-84E5-D7F9-058A-91794C5D2780}"/>
               </a:ext>
             </a:extLst>
           </p:cNvPr>
@@ -3836,7 +3836,7 @@
     </p:spTree>
     <p:extLst>
       <p:ext uri="{BB962C8B-B14F-4D97-AF65-F5344CB8AC3E}">
-        <p14:creationId xmlns:p14="http://schemas.microsoft.com/office/powerpoint/2010/main" val="3522501168"/>
+        <p14:creationId xmlns:p14="http://schemas.microsoft.com/office/powerpoint/2010/main" val="3491783752"/>
       </p:ext>
     </p:extLst>
   </p:cSld>
@@ -3960,7 +3960,7 @@
           <p:cNvPr id="2" name="テキスト ボックス 1">
             <a:extLst>
               <a:ext uri="{FF2B5EF4-FFF2-40B4-BE49-F238E27FC236}">
-                <a16:creationId xmlns:a16="http://schemas.microsoft.com/office/drawing/2014/main" id="{7D7BD5DE-D798-2EC0-8466-BC5F02BFBF4A}"/>
+                <a16:creationId xmlns:a16="http://schemas.microsoft.com/office/drawing/2014/main" id="{F64CF4F9-D0DD-A6B7-47BB-C5D66F4B16DE}"/>
               </a:ext>
             </a:extLst>
           </p:cNvPr>
@@ -4006,7 +4006,7 @@
           <p:cNvPr id="3" name="テキスト ボックス 2">
             <a:extLst>
               <a:ext uri="{FF2B5EF4-FFF2-40B4-BE49-F238E27FC236}">
-                <a16:creationId xmlns:a16="http://schemas.microsoft.com/office/drawing/2014/main" id="{85B574EE-CB47-1E00-D517-46F2A4DEE075}"/>
+                <a16:creationId xmlns:a16="http://schemas.microsoft.com/office/drawing/2014/main" id="{BCDB3BCA-6CA5-37F2-3F98-C501E6E05823}"/>
               </a:ext>
             </a:extLst>
           </p:cNvPr>
@@ -4046,7 +4046,7 @@
           <p:cNvPr id="4" name="テキスト ボックス 3">
             <a:extLst>
               <a:ext uri="{FF2B5EF4-FFF2-40B4-BE49-F238E27FC236}">
-                <a16:creationId xmlns:a16="http://schemas.microsoft.com/office/drawing/2014/main" id="{E2E31B70-52BE-CD3C-7762-3E518B5D1840}"/>
+                <a16:creationId xmlns:a16="http://schemas.microsoft.com/office/drawing/2014/main" id="{16BED8ED-2807-F9BD-8A1A-4FB5459E2691}"/>
               </a:ext>
             </a:extLst>
           </p:cNvPr>
@@ -4113,7 +4113,7 @@
           <p:cNvPr id="5" name="テキスト ボックス 4">
             <a:extLst>
               <a:ext uri="{FF2B5EF4-FFF2-40B4-BE49-F238E27FC236}">
-                <a16:creationId xmlns:a16="http://schemas.microsoft.com/office/drawing/2014/main" id="{95FFC792-BA86-B548-C6E1-B239EA3DEBF8}"/>
+                <a16:creationId xmlns:a16="http://schemas.microsoft.com/office/drawing/2014/main" id="{D3E2F9B8-2859-6C50-75A3-70320183C6E4}"/>
               </a:ext>
             </a:extLst>
           </p:cNvPr>
@@ -4160,7 +4160,7 @@
             <a:hlinkClick r:id="" action="ppaction://media"/>
             <a:extLst>
               <a:ext uri="{FF2B5EF4-FFF2-40B4-BE49-F238E27FC236}">
-                <a16:creationId xmlns:a16="http://schemas.microsoft.com/office/drawing/2014/main" id="{A7049F4F-F4D0-E969-2BC3-67CEFCC38E8A}"/>
+                <a16:creationId xmlns:a16="http://schemas.microsoft.com/office/drawing/2014/main" id="{C577474A-7BB4-E77E-7EA4-E6E299BCD984}"/>
               </a:ext>
             </a:extLst>
           </p:cNvPr>
@@ -4195,7 +4195,7 @@
     </p:spTree>
     <p:extLst>
       <p:ext uri="{BB962C8B-B14F-4D97-AF65-F5344CB8AC3E}">
-        <p14:creationId xmlns:p14="http://schemas.microsoft.com/office/powerpoint/2010/main" val="2731243468"/>
+        <p14:creationId xmlns:p14="http://schemas.microsoft.com/office/powerpoint/2010/main" val="3424798272"/>
       </p:ext>
     </p:extLst>
   </p:cSld>
@@ -4319,7 +4319,7 @@
           <p:cNvPr id="2" name="テキスト ボックス 1">
             <a:extLst>
               <a:ext uri="{FF2B5EF4-FFF2-40B4-BE49-F238E27FC236}">
-                <a16:creationId xmlns:a16="http://schemas.microsoft.com/office/drawing/2014/main" id="{1299E6DC-8D08-DE66-2F85-992BE77E0D49}"/>
+                <a16:creationId xmlns:a16="http://schemas.microsoft.com/office/drawing/2014/main" id="{A2F5E25C-1A97-97B3-D4B1-A228279E6EEA}"/>
               </a:ext>
             </a:extLst>
           </p:cNvPr>
@@ -4365,7 +4365,7 @@
           <p:cNvPr id="3" name="テキスト ボックス 2">
             <a:extLst>
               <a:ext uri="{FF2B5EF4-FFF2-40B4-BE49-F238E27FC236}">
-                <a16:creationId xmlns:a16="http://schemas.microsoft.com/office/drawing/2014/main" id="{83616F24-4373-76AA-634E-2558C4F629DA}"/>
+                <a16:creationId xmlns:a16="http://schemas.microsoft.com/office/drawing/2014/main" id="{35558D49-3AED-F1B6-4E14-64F31ED156F4}"/>
               </a:ext>
             </a:extLst>
           </p:cNvPr>
@@ -4405,7 +4405,7 @@
           <p:cNvPr id="4" name="テキスト ボックス 3">
             <a:extLst>
               <a:ext uri="{FF2B5EF4-FFF2-40B4-BE49-F238E27FC236}">
-                <a16:creationId xmlns:a16="http://schemas.microsoft.com/office/drawing/2014/main" id="{A4938105-9CA1-BD77-877C-E4B14895502B}"/>
+                <a16:creationId xmlns:a16="http://schemas.microsoft.com/office/drawing/2014/main" id="{E0D0E975-8232-8632-45E5-5605531B23F0}"/>
               </a:ext>
             </a:extLst>
           </p:cNvPr>
@@ -4464,7 +4464,7 @@
           <p:cNvPr id="5" name="テキスト ボックス 4">
             <a:extLst>
               <a:ext uri="{FF2B5EF4-FFF2-40B4-BE49-F238E27FC236}">
-                <a16:creationId xmlns:a16="http://schemas.microsoft.com/office/drawing/2014/main" id="{CD5FB18E-01DA-CE82-9E74-CD3D7DB7C552}"/>
+                <a16:creationId xmlns:a16="http://schemas.microsoft.com/office/drawing/2014/main" id="{F9B11B58-EF34-6A83-0EDE-41A924DD15EA}"/>
               </a:ext>
             </a:extLst>
           </p:cNvPr>
@@ -4511,7 +4511,7 @@
             <a:hlinkClick r:id="" action="ppaction://media"/>
             <a:extLst>
               <a:ext uri="{FF2B5EF4-FFF2-40B4-BE49-F238E27FC236}">
-                <a16:creationId xmlns:a16="http://schemas.microsoft.com/office/drawing/2014/main" id="{D3E0F494-0597-6847-EF8E-0FA39CA79752}"/>
+                <a16:creationId xmlns:a16="http://schemas.microsoft.com/office/drawing/2014/main" id="{4E408BE8-1A88-96CB-C7B5-84231B3C3C78}"/>
               </a:ext>
             </a:extLst>
           </p:cNvPr>
@@ -4546,7 +4546,7 @@
     </p:spTree>
     <p:extLst>
       <p:ext uri="{BB962C8B-B14F-4D97-AF65-F5344CB8AC3E}">
-        <p14:creationId xmlns:p14="http://schemas.microsoft.com/office/powerpoint/2010/main" val="717094519"/>
+        <p14:creationId xmlns:p14="http://schemas.microsoft.com/office/powerpoint/2010/main" val="2719715285"/>
       </p:ext>
     </p:extLst>
   </p:cSld>
@@ -4670,7 +4670,7 @@
           <p:cNvPr id="2" name="テキスト ボックス 1">
             <a:extLst>
               <a:ext uri="{FF2B5EF4-FFF2-40B4-BE49-F238E27FC236}">
-                <a16:creationId xmlns:a16="http://schemas.microsoft.com/office/drawing/2014/main" id="{7E749CF6-D4CC-3525-0E09-BBCF8FB4F335}"/>
+                <a16:creationId xmlns:a16="http://schemas.microsoft.com/office/drawing/2014/main" id="{E239301E-0BFD-67A7-4BCA-EEFA0445A618}"/>
               </a:ext>
             </a:extLst>
           </p:cNvPr>
@@ -4716,7 +4716,7 @@
           <p:cNvPr id="3" name="テキスト ボックス 2">
             <a:extLst>
               <a:ext uri="{FF2B5EF4-FFF2-40B4-BE49-F238E27FC236}">
-                <a16:creationId xmlns:a16="http://schemas.microsoft.com/office/drawing/2014/main" id="{35BF2121-8C06-4043-12A0-4F666EF459A8}"/>
+                <a16:creationId xmlns:a16="http://schemas.microsoft.com/office/drawing/2014/main" id="{26DF458D-B4EC-C387-578F-1EA1CEA500A2}"/>
               </a:ext>
             </a:extLst>
           </p:cNvPr>
@@ -4756,7 +4756,7 @@
           <p:cNvPr id="4" name="テキスト ボックス 3">
             <a:extLst>
               <a:ext uri="{FF2B5EF4-FFF2-40B4-BE49-F238E27FC236}">
-                <a16:creationId xmlns:a16="http://schemas.microsoft.com/office/drawing/2014/main" id="{FD1EDC23-245E-A9D6-7455-8743CEB507CD}"/>
+                <a16:creationId xmlns:a16="http://schemas.microsoft.com/office/drawing/2014/main" id="{3461BE6F-21E5-0128-5511-D8ED7CB4A597}"/>
               </a:ext>
             </a:extLst>
           </p:cNvPr>
@@ -4866,7 +4866,7 @@
           <p:cNvPr id="5" name="テキスト ボックス 4">
             <a:extLst>
               <a:ext uri="{FF2B5EF4-FFF2-40B4-BE49-F238E27FC236}">
-                <a16:creationId xmlns:a16="http://schemas.microsoft.com/office/drawing/2014/main" id="{8F663562-08FE-9C9B-8CD5-9CD530CC4593}"/>
+                <a16:creationId xmlns:a16="http://schemas.microsoft.com/office/drawing/2014/main" id="{362873EB-5808-2945-E125-F1E845711840}"/>
               </a:ext>
             </a:extLst>
           </p:cNvPr>
@@ -4913,7 +4913,7 @@
             <a:hlinkClick r:id="" action="ppaction://media"/>
             <a:extLst>
               <a:ext uri="{FF2B5EF4-FFF2-40B4-BE49-F238E27FC236}">
-                <a16:creationId xmlns:a16="http://schemas.microsoft.com/office/drawing/2014/main" id="{924CD828-7178-7E08-C0C8-4CD1430DC669}"/>
+                <a16:creationId xmlns:a16="http://schemas.microsoft.com/office/drawing/2014/main" id="{31C63AD7-273B-A4CE-5274-3913FA172661}"/>
               </a:ext>
             </a:extLst>
           </p:cNvPr>
@@ -4948,7 +4948,7 @@
     </p:spTree>
     <p:extLst>
       <p:ext uri="{BB962C8B-B14F-4D97-AF65-F5344CB8AC3E}">
-        <p14:creationId xmlns:p14="http://schemas.microsoft.com/office/powerpoint/2010/main" val="4058352819"/>
+        <p14:creationId xmlns:p14="http://schemas.microsoft.com/office/powerpoint/2010/main" val="9076324"/>
       </p:ext>
     </p:extLst>
   </p:cSld>
@@ -5072,7 +5072,7 @@
           <p:cNvPr id="2" name="テキスト ボックス 1">
             <a:extLst>
               <a:ext uri="{FF2B5EF4-FFF2-40B4-BE49-F238E27FC236}">
-                <a16:creationId xmlns:a16="http://schemas.microsoft.com/office/drawing/2014/main" id="{B456AD30-11EE-0B63-58BB-D02458E7508B}"/>
+                <a16:creationId xmlns:a16="http://schemas.microsoft.com/office/drawing/2014/main" id="{DE7BDBE2-63DA-2DBA-D818-82C1D08871A5}"/>
               </a:ext>
             </a:extLst>
           </p:cNvPr>
@@ -5118,7 +5118,7 @@
           <p:cNvPr id="3" name="テキスト ボックス 2">
             <a:extLst>
               <a:ext uri="{FF2B5EF4-FFF2-40B4-BE49-F238E27FC236}">
-                <a16:creationId xmlns:a16="http://schemas.microsoft.com/office/drawing/2014/main" id="{FA256770-E74A-8F39-D981-9FB7B75607BF}"/>
+                <a16:creationId xmlns:a16="http://schemas.microsoft.com/office/drawing/2014/main" id="{75D2D141-0893-563A-2D8A-BECF3A1C789F}"/>
               </a:ext>
             </a:extLst>
           </p:cNvPr>
@@ -5158,7 +5158,7 @@
           <p:cNvPr id="4" name="テキスト ボックス 3">
             <a:extLst>
               <a:ext uri="{FF2B5EF4-FFF2-40B4-BE49-F238E27FC236}">
-                <a16:creationId xmlns:a16="http://schemas.microsoft.com/office/drawing/2014/main" id="{65BC42AE-72CB-449C-E65E-9639C526A273}"/>
+                <a16:creationId xmlns:a16="http://schemas.microsoft.com/office/drawing/2014/main" id="{7549A699-225C-6F73-E06C-60EEFB54ABFC}"/>
               </a:ext>
             </a:extLst>
           </p:cNvPr>
@@ -5182,20 +5182,14 @@
           <a:lstStyle/>
           <a:p>
             <a:r>
-              <a:rPr kumimoji="1" lang="en-US" altLang="ja-JP" sz="2000">
+              <a:rPr kumimoji="1" lang="ja-JP" altLang="en-US" sz="2000">
                 <a:solidFill>
                   <a:srgbClr val="333333"/>
                 </a:solidFill>
                 <a:latin typeface="Arial" panose="020B0604020202020204" pitchFamily="34" charset="0"/>
               </a:rPr>
-              <a:t>Build GAME PORTAL JP mobile app prototype</a:t>
-            </a:r>
-            <a:endParaRPr kumimoji="1" lang="ja-JP" altLang="en-US" sz="2000">
-              <a:solidFill>
-                <a:srgbClr val="333333"/>
-              </a:solidFill>
-              <a:latin typeface="Arial" panose="020B0604020202020204" pitchFamily="34" charset="0"/>
-            </a:endParaRPr>
+              <a:t>直近のコミットでは、実装の見直しと継続的な改善が行われました。</a:t>
+            </a:r>
           </a:p>
         </p:txBody>
       </p:sp>
@@ -5204,7 +5198,7 @@
           <p:cNvPr id="5" name="テキスト ボックス 4">
             <a:extLst>
               <a:ext uri="{FF2B5EF4-FFF2-40B4-BE49-F238E27FC236}">
-                <a16:creationId xmlns:a16="http://schemas.microsoft.com/office/drawing/2014/main" id="{5DBF5111-9D40-A8D6-4396-9813A02D8487}"/>
+                <a16:creationId xmlns:a16="http://schemas.microsoft.com/office/drawing/2014/main" id="{05249181-3D76-0DCA-358A-FD7F521ED7F4}"/>
               </a:ext>
             </a:extLst>
           </p:cNvPr>
@@ -5251,7 +5245,7 @@
             <a:hlinkClick r:id="" action="ppaction://media"/>
             <a:extLst>
               <a:ext uri="{FF2B5EF4-FFF2-40B4-BE49-F238E27FC236}">
-                <a16:creationId xmlns:a16="http://schemas.microsoft.com/office/drawing/2014/main" id="{D372343A-A821-A71D-2C4D-D48F64CCEBB8}"/>
+                <a16:creationId xmlns:a16="http://schemas.microsoft.com/office/drawing/2014/main" id="{385036C2-5394-4A1C-A3E6-3BDFB36DF7CC}"/>
               </a:ext>
             </a:extLst>
           </p:cNvPr>
@@ -5286,7 +5280,7 @@
     </p:spTree>
     <p:extLst>
       <p:ext uri="{BB962C8B-B14F-4D97-AF65-F5344CB8AC3E}">
-        <p14:creationId xmlns:p14="http://schemas.microsoft.com/office/powerpoint/2010/main" val="3953336822"/>
+        <p14:creationId xmlns:p14="http://schemas.microsoft.com/office/powerpoint/2010/main" val="3528040223"/>
       </p:ext>
     </p:extLst>
   </p:cSld>
@@ -5295,10 +5289,10 @@
   </p:clrMapOvr>
   <mc:AlternateContent xmlns:mc="http://schemas.openxmlformats.org/markup-compatibility/2006">
     <mc:Choice xmlns:p14="http://schemas.microsoft.com/office/powerpoint/2010/main" Requires="p14">
-      <p:transition spd="slow" p14:dur="2000" advTm="8000"/>
+      <p:transition spd="slow" p14:dur="2000" advTm="7000"/>
     </mc:Choice>
     <mc:Fallback>
-      <p:transition spd="slow" advTm="8000"/>
+      <p:transition spd="slow" advTm="7000"/>
     </mc:Fallback>
   </mc:AlternateContent>
   <p:timing>
@@ -5329,7 +5323,7 @@
                                   <p:childTnLst>
                                     <p:cmd type="call" cmd="playFrom(0.0)">
                                       <p:cBhvr>
-                                        <p:cTn id="6" dur="7371" fill="hold"/>
+                                        <p:cTn id="6" dur="6076" fill="hold"/>
                                         <p:tgtEl>
                                           <p:spTgt spid="6"/>
                                         </p:tgtEl>
@@ -5410,7 +5404,7 @@
           <p:cNvPr id="2" name="テキスト ボックス 1">
             <a:extLst>
               <a:ext uri="{FF2B5EF4-FFF2-40B4-BE49-F238E27FC236}">
-                <a16:creationId xmlns:a16="http://schemas.microsoft.com/office/drawing/2014/main" id="{24AF36ED-2536-88E3-C855-796884E6C101}"/>
+                <a16:creationId xmlns:a16="http://schemas.microsoft.com/office/drawing/2014/main" id="{D0C02919-1165-7130-E2BB-71FF48ABBD09}"/>
               </a:ext>
             </a:extLst>
           </p:cNvPr>
@@ -5456,7 +5450,7 @@
           <p:cNvPr id="3" name="テキスト ボックス 2">
             <a:extLst>
               <a:ext uri="{FF2B5EF4-FFF2-40B4-BE49-F238E27FC236}">
-                <a16:creationId xmlns:a16="http://schemas.microsoft.com/office/drawing/2014/main" id="{F2D342E0-35CC-A568-9E64-3E8EEFB7E04E}"/>
+                <a16:creationId xmlns:a16="http://schemas.microsoft.com/office/drawing/2014/main" id="{D3F228C3-46C4-A727-F7F9-42E9E902F15B}"/>
               </a:ext>
             </a:extLst>
           </p:cNvPr>
@@ -5496,7 +5490,7 @@
           <p:cNvPr id="4" name="テキスト ボックス 3">
             <a:extLst>
               <a:ext uri="{FF2B5EF4-FFF2-40B4-BE49-F238E27FC236}">
-                <a16:creationId xmlns:a16="http://schemas.microsoft.com/office/drawing/2014/main" id="{823303E5-AC82-05E9-7C2D-27020D0223E6}"/>
+                <a16:creationId xmlns:a16="http://schemas.microsoft.com/office/drawing/2014/main" id="{ED5C2A19-9BDF-0687-CB6A-A28CCECC6C33}"/>
               </a:ext>
             </a:extLst>
           </p:cNvPr>
@@ -5561,7 +5555,7 @@
           <p:cNvPr id="5" name="テキスト ボックス 4">
             <a:extLst>
               <a:ext uri="{FF2B5EF4-FFF2-40B4-BE49-F238E27FC236}">
-                <a16:creationId xmlns:a16="http://schemas.microsoft.com/office/drawing/2014/main" id="{574D68FE-D1BB-6024-23DE-89FB5B6480B7}"/>
+                <a16:creationId xmlns:a16="http://schemas.microsoft.com/office/drawing/2014/main" id="{BF6ECB5C-0150-FD0C-1851-A7A19D93E912}"/>
               </a:ext>
             </a:extLst>
           </p:cNvPr>
@@ -5608,7 +5602,7 @@
             <a:hlinkClick r:id="" action="ppaction://media"/>
             <a:extLst>
               <a:ext uri="{FF2B5EF4-FFF2-40B4-BE49-F238E27FC236}">
-                <a16:creationId xmlns:a16="http://schemas.microsoft.com/office/drawing/2014/main" id="{0EE02384-F334-BC07-BD4D-4A30A5BDAB83}"/>
+                <a16:creationId xmlns:a16="http://schemas.microsoft.com/office/drawing/2014/main" id="{48AC1AE7-7730-DF62-F8B3-AAAF2BC590E3}"/>
               </a:ext>
             </a:extLst>
           </p:cNvPr>
@@ -5643,7 +5637,7 @@
     </p:spTree>
     <p:extLst>
       <p:ext uri="{BB962C8B-B14F-4D97-AF65-F5344CB8AC3E}">
-        <p14:creationId xmlns:p14="http://schemas.microsoft.com/office/powerpoint/2010/main" val="2286560722"/>
+        <p14:creationId xmlns:p14="http://schemas.microsoft.com/office/powerpoint/2010/main" val="3388561341"/>
       </p:ext>
     </p:extLst>
   </p:cSld>
